--- a/pastoral-projects/screen-time/downloads/How_Does_Screen_Time_Affect.pptx
+++ b/pastoral-projects/screen-time/downloads/How_Does_Screen_Time_Affect.pptx
@@ -3365,7 +3365,7 @@
                 <a:ea typeface="Karla" pitchFamily="34" charset="-122"/>
                 <a:cs typeface="Karla" pitchFamily="34" charset="-120"/>
               </a:rPr>
-              <a:t>It’s the same measure the research on the last few slides used, so you can see for yourself whether your habits are shifting.</a:t>
+              <a:t>It’s the kind of measure the research on the last few slides used, so you can see for yourself whether your habits are shifting.</a:t>
             </a:r>
             <a:endParaRPr lang="en-US" sz="1300" dirty="0"/>
           </a:p>
@@ -5758,7 +5758,7 @@
                 <a:ea typeface="Karla" pitchFamily="34" charset="-122"/>
                 <a:cs typeface="Karla" pitchFamily="34" charset="-120"/>
               </a:rPr>
-              <a:t>Screen time measurably worsened sleep within just three months (Hökby et al., 2025).</a:t>
+              <a:t>More screen time was linked to worse sleep within just three months (Hökby et al., 2025).</a:t>
             </a:r>
             <a:endParaRPr lang="en-US" sz="1400" dirty="0"/>
           </a:p>
@@ -7553,7 +7553,7 @@
                 <a:ea typeface="Karla" pitchFamily="34" charset="-122"/>
                 <a:cs typeface="Karla" pitchFamily="34" charset="-120"/>
               </a:rPr>
-              <a:t>Get out all your reflections from this term, session 1 and the midpoint check-in, and look back over the whole picture.</a:t>
+              <a:t>Get out your sheets from session 1 and the halfway check-in, and look back over the whole term.</a:t>
             </a:r>
             <a:endParaRPr lang="en-US" sz="1300" dirty="0"/>
           </a:p>
@@ -7655,7 +7655,7 @@
                 <a:ea typeface="Karla" pitchFamily="34" charset="-122"/>
                 <a:cs typeface="Karla" pitchFamily="34" charset="-120"/>
               </a:rPr>
-              <a:t>Looking back at your Initial Reflection and Reduction Plan, how has your screen time changed this term?</a:t>
+              <a:t>Looking back at your first reflection and your plan, how has your screen time changed this term?</a:t>
             </a:r>
             <a:endParaRPr lang="en-US" sz="1450" dirty="0"/>
           </a:p>
@@ -11237,7 +11237,7 @@
                 <a:ea typeface="Karla" pitchFamily="34" charset="-122"/>
                 <a:cs typeface="Karla" pitchFamily="34" charset="-120"/>
               </a:rPr>
-              <a:t>17,150 students, grades 7 and 9 (China Education Panel Survey)</a:t>
+              <a:t>17,150 students aged 13 to 15 (China Education Panel Survey)</a:t>
             </a:r>
             <a:endParaRPr lang="en-US" sz="1250" dirty="0"/>
           </a:p>
@@ -11280,7 +11280,7 @@
                 <a:ea typeface="Karla" pitchFamily="34" charset="-122"/>
                 <a:cs typeface="Karla" pitchFamily="34" charset="-120"/>
               </a:rPr>
-              <a:t>More screen time was linked to lower grades overall, and specifically in maths, English and first language.</a:t>
+              <a:t>More screen time was linked to lower grades overall, and in maths, English and Chinese in particular.</a:t>
             </a:r>
             <a:endParaRPr lang="en-US" sz="1450" dirty="0"/>
           </a:p>
@@ -13383,7 +13383,7 @@
                 <a:ea typeface="Karla" pitchFamily="34" charset="-122"/>
                 <a:cs typeface="Karla" pitchFamily="34" charset="-120"/>
               </a:rPr>
-              <a:t>How do you usually feel afterwards: energised, drained, fine, or anxious?</a:t>
+              <a:t>How do you usually feel afterwards: drained, flat, fine, good or energised?</a:t>
             </a:r>
             <a:endParaRPr lang="en-US" sz="1450" dirty="0"/>
           </a:p>

--- a/pastoral-projects/screen-time/downloads/How_Does_Screen_Time_Affect.pptx
+++ b/pastoral-projects/screen-time/downloads/How_Does_Screen_Time_Affect.pptx
@@ -2780,9 +2780,9 @@
                 <a:solidFill>
                   <a:srgbClr val="8B9179"/>
                 </a:solidFill>
-                <a:latin typeface="Karla" pitchFamily="34" charset="0"/>
-                <a:ea typeface="Karla" pitchFamily="34" charset="-122"/>
-                <a:cs typeface="Karla" pitchFamily="34" charset="-120"/>
+                <a:latin typeface="Calibri" pitchFamily="34" charset="0"/>
+                <a:ea typeface="Calibri" pitchFamily="34" charset="-122"/>
+                <a:cs typeface="Calibri" pitchFamily="34" charset="-120"/>
               </a:rPr>
               <a:t>THE PASTORAL GUIDE</a:t>
             </a:r>
@@ -2819,9 +2819,9 @@
                 <a:solidFill>
                   <a:srgbClr val="C28F38"/>
                 </a:solidFill>
-                <a:latin typeface="Karla" pitchFamily="34" charset="0"/>
-                <a:ea typeface="Karla" pitchFamily="34" charset="-122"/>
-                <a:cs typeface="Karla" pitchFamily="34" charset="-120"/>
+                <a:latin typeface="Calibri" pitchFamily="34" charset="0"/>
+                <a:ea typeface="Calibri" pitchFamily="34" charset="-122"/>
+                <a:cs typeface="Calibri" pitchFamily="34" charset="-120"/>
               </a:rPr>
               <a:t>A PASTORAL PROJECTS RESOURCE</a:t>
             </a:r>
@@ -2854,13 +2854,13 @@
               <a:buNone/>
             </a:pPr>
             <a:r>
-              <a:rPr lang="en-US" sz="4400" b="1" dirty="0">
+              <a:rPr lang="en-US" sz="4400" b="0" dirty="0">
                 <a:solidFill>
                   <a:srgbClr val="2E4436"/>
                 </a:solidFill>
-                <a:latin typeface="Libre Caslon Display" pitchFamily="34" charset="0"/>
-                <a:ea typeface="Libre Caslon Display" pitchFamily="34" charset="-122"/>
-                <a:cs typeface="Libre Caslon Display" pitchFamily="34" charset="-120"/>
+                <a:latin typeface="Georgia" pitchFamily="34" charset="0"/>
+                <a:ea typeface="Georgia" pitchFamily="34" charset="-122"/>
+                <a:cs typeface="Georgia" pitchFamily="34" charset="-120"/>
               </a:rPr>
               <a:t>How Does Screen Time Affect…</a:t>
             </a:r>
@@ -2897,9 +2897,9 @@
                 <a:solidFill>
                   <a:srgbClr val="C28F38"/>
                 </a:solidFill>
-                <a:latin typeface="Libre Caslon Display" pitchFamily="34" charset="0"/>
-                <a:ea typeface="Libre Caslon Display" pitchFamily="34" charset="-122"/>
-                <a:cs typeface="Libre Caslon Display" pitchFamily="34" charset="-120"/>
+                <a:latin typeface="Georgia" pitchFamily="34" charset="0"/>
+                <a:ea typeface="Georgia" pitchFamily="34" charset="-122"/>
+                <a:cs typeface="Georgia" pitchFamily="34" charset="-120"/>
               </a:rPr>
               <a:t>Sleep, Concentration &amp; the Teenage Brain?</a:t>
             </a:r>
@@ -2936,9 +2936,9 @@
                 <a:solidFill>
                   <a:srgbClr val="5C6552"/>
                 </a:solidFill>
-                <a:latin typeface="Karla" pitchFamily="34" charset="0"/>
-                <a:ea typeface="Karla" pitchFamily="34" charset="-122"/>
-                <a:cs typeface="Karla" pitchFamily="34" charset="-120"/>
+                <a:latin typeface="Calibri" pitchFamily="34" charset="0"/>
+                <a:ea typeface="Calibri" pitchFamily="34" charset="-122"/>
+                <a:cs typeface="Calibri" pitchFamily="34" charset="-120"/>
               </a:rPr>
               <a:t>Session 1 of 3  ·  paired with the Screen Time Tracker, running all term</a:t>
             </a:r>
@@ -3031,9 +3031,9 @@
                 <a:solidFill>
                   <a:srgbClr val="8B9179"/>
                 </a:solidFill>
-                <a:latin typeface="Karla" pitchFamily="34" charset="0"/>
-                <a:ea typeface="Karla" pitchFamily="34" charset="-122"/>
-                <a:cs typeface="Karla" pitchFamily="34" charset="-120"/>
+                <a:latin typeface="Calibri" pitchFamily="34" charset="0"/>
+                <a:ea typeface="Calibri" pitchFamily="34" charset="-122"/>
+                <a:cs typeface="Calibri" pitchFamily="34" charset="-120"/>
               </a:rPr>
               <a:t>THE PASTORAL GUIDE</a:t>
             </a:r>
@@ -3070,9 +3070,9 @@
                 <a:solidFill>
                   <a:srgbClr val="C28F38"/>
                 </a:solidFill>
-                <a:latin typeface="Karla" pitchFamily="34" charset="0"/>
-                <a:ea typeface="Karla" pitchFamily="34" charset="-122"/>
-                <a:cs typeface="Karla" pitchFamily="34" charset="-120"/>
+                <a:latin typeface="Calibri" pitchFamily="34" charset="0"/>
+                <a:ea typeface="Calibri" pitchFamily="34" charset="-122"/>
+                <a:cs typeface="Calibri" pitchFamily="34" charset="-120"/>
               </a:rPr>
               <a:t>FROM TODAY</a:t>
             </a:r>
@@ -3105,13 +3105,13 @@
               <a:buNone/>
             </a:pPr>
             <a:r>
-              <a:rPr lang="en-US" sz="3000" b="1" dirty="0">
+              <a:rPr lang="en-US" sz="3000" b="0" dirty="0">
                 <a:solidFill>
                   <a:srgbClr val="2E4436"/>
                 </a:solidFill>
-                <a:latin typeface="Libre Caslon Display" pitchFamily="34" charset="0"/>
-                <a:ea typeface="Libre Caslon Display" pitchFamily="34" charset="-122"/>
-                <a:cs typeface="Libre Caslon Display" pitchFamily="34" charset="-120"/>
+                <a:latin typeface="Georgia" pitchFamily="34" charset="0"/>
+                <a:ea typeface="Georgia" pitchFamily="34" charset="-122"/>
+                <a:cs typeface="Georgia" pitchFamily="34" charset="-120"/>
               </a:rPr>
               <a:t>Introducing the Screen Time Tracker</a:t>
             </a:r>
@@ -3196,9 +3196,9 @@
                 <a:solidFill>
                   <a:srgbClr val="2E4436"/>
                 </a:solidFill>
-                <a:latin typeface="Karla" pitchFamily="34" charset="0"/>
-                <a:ea typeface="Karla" pitchFamily="34" charset="-122"/>
-                <a:cs typeface="Karla" pitchFamily="34" charset="-120"/>
+                <a:latin typeface="Calibri" pitchFamily="34" charset="0"/>
+                <a:ea typeface="Calibri" pitchFamily="34" charset="-122"/>
+                <a:cs typeface="Calibri" pitchFamily="34" charset="-120"/>
               </a:rPr>
               <a:t>What’s being tracked</a:t>
             </a:r>
@@ -3235,9 +3235,9 @@
                 <a:solidFill>
                   <a:srgbClr val="5C6552"/>
                 </a:solidFill>
-                <a:latin typeface="Karla" pitchFamily="34" charset="0"/>
-                <a:ea typeface="Karla" pitchFamily="34" charset="-122"/>
-                <a:cs typeface="Karla" pitchFamily="34" charset="-120"/>
+                <a:latin typeface="Calibri" pitchFamily="34" charset="0"/>
+                <a:ea typeface="Calibri" pitchFamily="34" charset="-122"/>
+                <a:cs typeface="Calibri" pitchFamily="34" charset="-120"/>
               </a:rPr>
               <a:t>Your average daily screen time, entered weekly by your teacher, for the whole term. Nobody but your teacher and form sees the raw numbers.</a:t>
             </a:r>
@@ -3322,9 +3322,9 @@
                 <a:solidFill>
                   <a:srgbClr val="2E4436"/>
                 </a:solidFill>
-                <a:latin typeface="Karla" pitchFamily="34" charset="0"/>
-                <a:ea typeface="Karla" pitchFamily="34" charset="-122"/>
-                <a:cs typeface="Karla" pitchFamily="34" charset="-120"/>
+                <a:latin typeface="Calibri" pitchFamily="34" charset="0"/>
+                <a:ea typeface="Calibri" pitchFamily="34" charset="-122"/>
+                <a:cs typeface="Calibri" pitchFamily="34" charset="-120"/>
               </a:rPr>
               <a:t>Why it matters</a:t>
             </a:r>
@@ -3361,9 +3361,9 @@
                 <a:solidFill>
                   <a:srgbClr val="5C6552"/>
                 </a:solidFill>
-                <a:latin typeface="Karla" pitchFamily="34" charset="0"/>
-                <a:ea typeface="Karla" pitchFamily="34" charset="-122"/>
-                <a:cs typeface="Karla" pitchFamily="34" charset="-120"/>
+                <a:latin typeface="Calibri" pitchFamily="34" charset="0"/>
+                <a:ea typeface="Calibri" pitchFamily="34" charset="-122"/>
+                <a:cs typeface="Calibri" pitchFamily="34" charset="-120"/>
               </a:rPr>
               <a:t>It’s the kind of measure the research on the last few slides used, so you can see for yourself whether your habits are shifting.</a:t>
             </a:r>
@@ -3426,9 +3426,9 @@
                 <a:solidFill>
                   <a:srgbClr val="C28F38"/>
                 </a:solidFill>
-                <a:latin typeface="Karla" pitchFamily="34" charset="0"/>
-                <a:ea typeface="Karla" pitchFamily="34" charset="-122"/>
-                <a:cs typeface="Karla" pitchFamily="34" charset="-120"/>
+                <a:latin typeface="Calibri" pitchFamily="34" charset="0"/>
+                <a:ea typeface="Calibri" pitchFamily="34" charset="-122"/>
+                <a:cs typeface="Calibri" pitchFamily="34" charset="-120"/>
               </a:rPr>
               <a:t>Two awards, revealed at the end of term:</a:t>
             </a:r>
@@ -3468,9 +3468,9 @@
                 <a:solidFill>
                   <a:srgbClr val="2E4436"/>
                 </a:solidFill>
-                <a:latin typeface="Karla" pitchFamily="34" charset="0"/>
-                <a:ea typeface="Karla" pitchFamily="34" charset="-122"/>
-                <a:cs typeface="Karla" pitchFamily="34" charset="-120"/>
+                <a:latin typeface="Calibri" pitchFamily="34" charset="0"/>
+                <a:ea typeface="Calibri" pitchFamily="34" charset="-122"/>
+                <a:cs typeface="Calibri" pitchFamily="34" charset="-120"/>
               </a:rPr>
               <a:t>Lowest total screen time</a:t>
             </a:r>
@@ -3488,9 +3488,9 @@
                 <a:solidFill>
                   <a:srgbClr val="2E4436"/>
                 </a:solidFill>
-                <a:latin typeface="Karla" pitchFamily="34" charset="0"/>
-                <a:ea typeface="Karla" pitchFamily="34" charset="-122"/>
-                <a:cs typeface="Karla" pitchFamily="34" charset="-120"/>
+                <a:latin typeface="Calibri" pitchFamily="34" charset="0"/>
+                <a:ea typeface="Calibri" pitchFamily="34" charset="-122"/>
+                <a:cs typeface="Calibri" pitchFamily="34" charset="-120"/>
               </a:rPr>
               <a:t>Most reduced screen time: the biggest downward trend across the term</a:t>
             </a:r>
@@ -3583,9 +3583,9 @@
                 <a:solidFill>
                   <a:srgbClr val="8B9179"/>
                 </a:solidFill>
-                <a:latin typeface="Karla" pitchFamily="34" charset="0"/>
-                <a:ea typeface="Karla" pitchFamily="34" charset="-122"/>
-                <a:cs typeface="Karla" pitchFamily="34" charset="-120"/>
+                <a:latin typeface="Calibri" pitchFamily="34" charset="0"/>
+                <a:ea typeface="Calibri" pitchFamily="34" charset="-122"/>
+                <a:cs typeface="Calibri" pitchFamily="34" charset="-120"/>
               </a:rPr>
               <a:t>THE PASTORAL GUIDE</a:t>
             </a:r>
@@ -3622,9 +3622,9 @@
                 <a:solidFill>
                   <a:srgbClr val="C28F38"/>
                 </a:solidFill>
-                <a:latin typeface="Karla" pitchFamily="34" charset="0"/>
-                <a:ea typeface="Karla" pitchFamily="34" charset="-122"/>
-                <a:cs typeface="Karla" pitchFamily="34" charset="-120"/>
+                <a:latin typeface="Calibri" pitchFamily="34" charset="0"/>
+                <a:ea typeface="Calibri" pitchFamily="34" charset="-122"/>
+                <a:cs typeface="Calibri" pitchFamily="34" charset="-120"/>
               </a:rPr>
               <a:t>ACTIVITY 2 · DO THIS NOW</a:t>
             </a:r>
@@ -3683,13 +3683,13 @@
               <a:buNone/>
             </a:pPr>
             <a:r>
-              <a:rPr lang="en-US" sz="2600" b="1" dirty="0">
+              <a:rPr lang="en-US" sz="2600" b="0" dirty="0">
                 <a:solidFill>
                   <a:srgbClr val="2E4436"/>
                 </a:solidFill>
-                <a:latin typeface="Libre Caslon Display" pitchFamily="34" charset="0"/>
-                <a:ea typeface="Libre Caslon Display" pitchFamily="34" charset="-122"/>
-                <a:cs typeface="Libre Caslon Display" pitchFamily="34" charset="-120"/>
+                <a:latin typeface="Georgia" pitchFamily="34" charset="0"/>
+                <a:ea typeface="Georgia" pitchFamily="34" charset="-122"/>
+                <a:cs typeface="Georgia" pitchFamily="34" charset="-120"/>
               </a:rPr>
               <a:t>My Screen Time Reduction Plan</a:t>
             </a:r>
@@ -3726,9 +3726,9 @@
                 <a:solidFill>
                   <a:srgbClr val="5C6552"/>
                 </a:solidFill>
-                <a:latin typeface="Karla" pitchFamily="34" charset="0"/>
-                <a:ea typeface="Karla" pitchFamily="34" charset="-122"/>
-                <a:cs typeface="Karla" pitchFamily="34" charset="-120"/>
+                <a:latin typeface="Calibri" pitchFamily="34" charset="0"/>
+                <a:ea typeface="Calibri" pitchFamily="34" charset="-122"/>
+                <a:cs typeface="Calibri" pitchFamily="34" charset="-120"/>
               </a:rPr>
               <a:t>Pick one realistic change, not five. Small and specific beats big and vague.</a:t>
             </a:r>
@@ -3789,9 +3789,9 @@
                 <a:solidFill>
                   <a:srgbClr val="FFFFFF"/>
                 </a:solidFill>
-                <a:latin typeface="Karla" pitchFamily="34" charset="0"/>
-                <a:ea typeface="Karla" pitchFamily="34" charset="-122"/>
-                <a:cs typeface="Karla" pitchFamily="34" charset="-120"/>
+                <a:latin typeface="Calibri" pitchFamily="34" charset="0"/>
+                <a:ea typeface="Calibri" pitchFamily="34" charset="-122"/>
+                <a:cs typeface="Calibri" pitchFamily="34" charset="-120"/>
               </a:rPr>
               <a:t>1</a:t>
             </a:r>
@@ -3828,9 +3828,9 @@
                 <a:solidFill>
                   <a:srgbClr val="2E4436"/>
                 </a:solidFill>
-                <a:latin typeface="Karla" pitchFamily="34" charset="0"/>
-                <a:ea typeface="Karla" pitchFamily="34" charset="-122"/>
-                <a:cs typeface="Karla" pitchFamily="34" charset="-120"/>
+                <a:latin typeface="Calibri" pitchFamily="34" charset="0"/>
+                <a:ea typeface="Calibri" pitchFamily="34" charset="-122"/>
+                <a:cs typeface="Calibri" pitchFamily="34" charset="-120"/>
               </a:rPr>
               <a:t>One thing I’ll change this week: ______________________</a:t>
             </a:r>
@@ -3918,9 +3918,9 @@
                 <a:solidFill>
                   <a:srgbClr val="FFFFFF"/>
                 </a:solidFill>
-                <a:latin typeface="Karla" pitchFamily="34" charset="0"/>
-                <a:ea typeface="Karla" pitchFamily="34" charset="-122"/>
-                <a:cs typeface="Karla" pitchFamily="34" charset="-120"/>
+                <a:latin typeface="Calibri" pitchFamily="34" charset="0"/>
+                <a:ea typeface="Calibri" pitchFamily="34" charset="-122"/>
+                <a:cs typeface="Calibri" pitchFamily="34" charset="-120"/>
               </a:rPr>
               <a:t>2</a:t>
             </a:r>
@@ -3957,9 +3957,9 @@
                 <a:solidFill>
                   <a:srgbClr val="2E4436"/>
                 </a:solidFill>
-                <a:latin typeface="Karla" pitchFamily="34" charset="0"/>
-                <a:ea typeface="Karla" pitchFamily="34" charset="-122"/>
-                <a:cs typeface="Karla" pitchFamily="34" charset="-120"/>
+                <a:latin typeface="Calibri" pitchFamily="34" charset="0"/>
+                <a:ea typeface="Calibri" pitchFamily="34" charset="-122"/>
+                <a:cs typeface="Calibri" pitchFamily="34" charset="-120"/>
               </a:rPr>
               <a:t>A screen-free time or place I’ll try (e.g. no phone at meals, none 30 minutes before bed): ______________________</a:t>
             </a:r>
@@ -4047,9 +4047,9 @@
                 <a:solidFill>
                   <a:srgbClr val="FFFFFF"/>
                 </a:solidFill>
-                <a:latin typeface="Karla" pitchFamily="34" charset="0"/>
-                <a:ea typeface="Karla" pitchFamily="34" charset="-122"/>
-                <a:cs typeface="Karla" pitchFamily="34" charset="-120"/>
+                <a:latin typeface="Calibri" pitchFamily="34" charset="0"/>
+                <a:ea typeface="Calibri" pitchFamily="34" charset="-122"/>
+                <a:cs typeface="Calibri" pitchFamily="34" charset="-120"/>
               </a:rPr>
               <a:t>3</a:t>
             </a:r>
@@ -4086,9 +4086,9 @@
                 <a:solidFill>
                   <a:srgbClr val="2E4436"/>
                 </a:solidFill>
-                <a:latin typeface="Karla" pitchFamily="34" charset="0"/>
-                <a:ea typeface="Karla" pitchFamily="34" charset="-122"/>
-                <a:cs typeface="Karla" pitchFamily="34" charset="-120"/>
+                <a:latin typeface="Calibri" pitchFamily="34" charset="0"/>
+                <a:ea typeface="Calibri" pitchFamily="34" charset="-122"/>
+                <a:cs typeface="Calibri" pitchFamily="34" charset="-120"/>
               </a:rPr>
               <a:t>What I’ll do instead in that time: ______________________</a:t>
             </a:r>
@@ -4176,9 +4176,9 @@
                 <a:solidFill>
                   <a:srgbClr val="FFFFFF"/>
                 </a:solidFill>
-                <a:latin typeface="Karla" pitchFamily="34" charset="0"/>
-                <a:ea typeface="Karla" pitchFamily="34" charset="-122"/>
-                <a:cs typeface="Karla" pitchFamily="34" charset="-120"/>
+                <a:latin typeface="Calibri" pitchFamily="34" charset="0"/>
+                <a:ea typeface="Calibri" pitchFamily="34" charset="-122"/>
+                <a:cs typeface="Calibri" pitchFamily="34" charset="-120"/>
               </a:rPr>
               <a:t>4</a:t>
             </a:r>
@@ -4215,9 +4215,9 @@
                 <a:solidFill>
                   <a:srgbClr val="2E4436"/>
                 </a:solidFill>
-                <a:latin typeface="Karla" pitchFamily="34" charset="0"/>
-                <a:ea typeface="Karla" pitchFamily="34" charset="-122"/>
-                <a:cs typeface="Karla" pitchFamily="34" charset="-120"/>
+                <a:latin typeface="Calibri" pitchFamily="34" charset="0"/>
+                <a:ea typeface="Calibri" pitchFamily="34" charset="-122"/>
+                <a:cs typeface="Calibri" pitchFamily="34" charset="-120"/>
               </a:rPr>
               <a:t>How I’ll know it’s working by the halfway check-in: ______________________</a:t>
             </a:r>
@@ -4254,9 +4254,9 @@
                 <a:solidFill>
                   <a:srgbClr val="C28F38"/>
                 </a:solidFill>
-                <a:latin typeface="Karla" pitchFamily="34" charset="0"/>
-                <a:ea typeface="Karla" pitchFamily="34" charset="-122"/>
-                <a:cs typeface="Karla" pitchFamily="34" charset="-120"/>
+                <a:latin typeface="Calibri" pitchFamily="34" charset="0"/>
+                <a:ea typeface="Calibri" pitchFamily="34" charset="-122"/>
+                <a:cs typeface="Calibri" pitchFamily="34" charset="-120"/>
               </a:rPr>
               <a:t>Printable worksheet version: Screen Time Reduction Plan (PDF)</a:t>
             </a:r>
@@ -4293,9 +4293,9 @@
                 <a:solidFill>
                   <a:srgbClr val="C28F38"/>
                 </a:solidFill>
-                <a:latin typeface="Karla" pitchFamily="34" charset="0"/>
-                <a:ea typeface="Karla" pitchFamily="34" charset="-122"/>
-                <a:cs typeface="Karla" pitchFamily="34" charset="-120"/>
+                <a:latin typeface="Calibri" pitchFamily="34" charset="0"/>
+                <a:ea typeface="Calibri" pitchFamily="34" charset="-122"/>
+                <a:cs typeface="Calibri" pitchFamily="34" charset="-120"/>
               </a:rPr>
               <a:t>SESSION 1</a:t>
             </a:r>
@@ -4388,9 +4388,9 @@
                 <a:solidFill>
                   <a:srgbClr val="8B9179"/>
                 </a:solidFill>
-                <a:latin typeface="Karla" pitchFamily="34" charset="0"/>
-                <a:ea typeface="Karla" pitchFamily="34" charset="-122"/>
-                <a:cs typeface="Karla" pitchFamily="34" charset="-120"/>
+                <a:latin typeface="Calibri" pitchFamily="34" charset="0"/>
+                <a:ea typeface="Calibri" pitchFamily="34" charset="-122"/>
+                <a:cs typeface="Calibri" pitchFamily="34" charset="-120"/>
               </a:rPr>
               <a:t>THE PASTORAL GUIDE</a:t>
             </a:r>
@@ -4427,9 +4427,9 @@
                 <a:solidFill>
                   <a:srgbClr val="C28F38"/>
                 </a:solidFill>
-                <a:latin typeface="Karla" pitchFamily="34" charset="0"/>
-                <a:ea typeface="Karla" pitchFamily="34" charset="-122"/>
-                <a:cs typeface="Karla" pitchFamily="34" charset="-120"/>
+                <a:latin typeface="Calibri" pitchFamily="34" charset="0"/>
+                <a:ea typeface="Calibri" pitchFamily="34" charset="-122"/>
+                <a:cs typeface="Calibri" pitchFamily="34" charset="-120"/>
               </a:rPr>
               <a:t>SESSION 1 · WRAP-UP</a:t>
             </a:r>
@@ -4462,13 +4462,13 @@
               <a:buNone/>
             </a:pPr>
             <a:r>
-              <a:rPr lang="en-US" sz="3200" b="1" dirty="0">
+              <a:rPr lang="en-US" sz="3200" b="0" dirty="0">
                 <a:solidFill>
                   <a:srgbClr val="2E4436"/>
                 </a:solidFill>
-                <a:latin typeface="Libre Caslon Display" pitchFamily="34" charset="0"/>
-                <a:ea typeface="Libre Caslon Display" pitchFamily="34" charset="-122"/>
-                <a:cs typeface="Libre Caslon Display" pitchFamily="34" charset="-120"/>
+                <a:latin typeface="Georgia" pitchFamily="34" charset="0"/>
+                <a:ea typeface="Georgia" pitchFamily="34" charset="-122"/>
+                <a:cs typeface="Georgia" pitchFamily="34" charset="-120"/>
               </a:rPr>
               <a:t>What happens next</a:t>
             </a:r>
@@ -4580,9 +4580,9 @@
                 <a:solidFill>
                   <a:srgbClr val="2E4436"/>
                 </a:solidFill>
-                <a:latin typeface="Karla" pitchFamily="34" charset="0"/>
-                <a:ea typeface="Karla" pitchFamily="34" charset="-122"/>
-                <a:cs typeface="Karla" pitchFamily="34" charset="-120"/>
+                <a:latin typeface="Calibri" pitchFamily="34" charset="0"/>
+                <a:ea typeface="Calibri" pitchFamily="34" charset="-122"/>
+                <a:cs typeface="Calibri" pitchFamily="34" charset="-120"/>
               </a:rPr>
               <a:t>Today</a:t>
             </a:r>
@@ -4619,9 +4619,9 @@
                 <a:solidFill>
                   <a:srgbClr val="5C6552"/>
                 </a:solidFill>
-                <a:latin typeface="Karla" pitchFamily="34" charset="0"/>
-                <a:ea typeface="Karla" pitchFamily="34" charset="-122"/>
-                <a:cs typeface="Karla" pitchFamily="34" charset="-120"/>
+                <a:latin typeface="Calibri" pitchFamily="34" charset="0"/>
+                <a:ea typeface="Calibri" pitchFamily="34" charset="-122"/>
+                <a:cs typeface="Calibri" pitchFamily="34" charset="-120"/>
               </a:rPr>
               <a:t>Reflection + reduction plan done</a:t>
             </a:r>
@@ -4706,9 +4706,9 @@
                 <a:solidFill>
                   <a:srgbClr val="2E4436"/>
                 </a:solidFill>
-                <a:latin typeface="Karla" pitchFamily="34" charset="0"/>
-                <a:ea typeface="Karla" pitchFamily="34" charset="-122"/>
-                <a:cs typeface="Karla" pitchFamily="34" charset="-120"/>
+                <a:latin typeface="Calibri" pitchFamily="34" charset="0"/>
+                <a:ea typeface="Calibri" pitchFamily="34" charset="-122"/>
+                <a:cs typeface="Calibri" pitchFamily="34" charset="-120"/>
               </a:rPr>
               <a:t>Every week</a:t>
             </a:r>
@@ -4745,9 +4745,9 @@
                 <a:solidFill>
                   <a:srgbClr val="5C6552"/>
                 </a:solidFill>
-                <a:latin typeface="Karla" pitchFamily="34" charset="0"/>
-                <a:ea typeface="Karla" pitchFamily="34" charset="-122"/>
-                <a:cs typeface="Karla" pitchFamily="34" charset="-120"/>
+                <a:latin typeface="Calibri" pitchFamily="34" charset="0"/>
+                <a:ea typeface="Calibri" pitchFamily="34" charset="-122"/>
+                <a:cs typeface="Calibri" pitchFamily="34" charset="-120"/>
               </a:rPr>
               <a:t>Tracker updated in class</a:t>
             </a:r>
@@ -4832,9 +4832,9 @@
                 <a:solidFill>
                   <a:srgbClr val="2E4436"/>
                 </a:solidFill>
-                <a:latin typeface="Karla" pitchFamily="34" charset="0"/>
-                <a:ea typeface="Karla" pitchFamily="34" charset="-122"/>
-                <a:cs typeface="Karla" pitchFamily="34" charset="-120"/>
+                <a:latin typeface="Calibri" pitchFamily="34" charset="0"/>
+                <a:ea typeface="Calibri" pitchFamily="34" charset="-122"/>
+                <a:cs typeface="Calibri" pitchFamily="34" charset="-120"/>
               </a:rPr>
               <a:t>Halfway</a:t>
             </a:r>
@@ -4871,9 +4871,9 @@
                 <a:solidFill>
                   <a:srgbClr val="5C6552"/>
                 </a:solidFill>
-                <a:latin typeface="Karla" pitchFamily="34" charset="0"/>
-                <a:ea typeface="Karla" pitchFamily="34" charset="-122"/>
-                <a:cs typeface="Karla" pitchFamily="34" charset="-120"/>
+                <a:latin typeface="Calibri" pitchFamily="34" charset="0"/>
+                <a:ea typeface="Calibri" pitchFamily="34" charset="-122"/>
+                <a:cs typeface="Calibri" pitchFamily="34" charset="-120"/>
               </a:rPr>
               <a:t>Session 2: check in on your plan</a:t>
             </a:r>
@@ -4958,9 +4958,9 @@
                 <a:solidFill>
                   <a:srgbClr val="2E4436"/>
                 </a:solidFill>
-                <a:latin typeface="Karla" pitchFamily="34" charset="0"/>
-                <a:ea typeface="Karla" pitchFamily="34" charset="-122"/>
-                <a:cs typeface="Karla" pitchFamily="34" charset="-120"/>
+                <a:latin typeface="Calibri" pitchFamily="34" charset="0"/>
+                <a:ea typeface="Calibri" pitchFamily="34" charset="-122"/>
+                <a:cs typeface="Calibri" pitchFamily="34" charset="-120"/>
               </a:rPr>
               <a:t>End of term</a:t>
             </a:r>
@@ -4997,9 +4997,9 @@
                 <a:solidFill>
                   <a:srgbClr val="5C6552"/>
                 </a:solidFill>
-                <a:latin typeface="Karla" pitchFamily="34" charset="0"/>
-                <a:ea typeface="Karla" pitchFamily="34" charset="-122"/>
-                <a:cs typeface="Karla" pitchFamily="34" charset="-120"/>
+                <a:latin typeface="Calibri" pitchFamily="34" charset="0"/>
+                <a:ea typeface="Calibri" pitchFamily="34" charset="-122"/>
+                <a:cs typeface="Calibri" pitchFamily="34" charset="-120"/>
               </a:rPr>
               <a:t>Session 3: final reflection + awards</a:t>
             </a:r>
@@ -5116,9 +5116,9 @@
                 <a:solidFill>
                   <a:srgbClr val="8B9179"/>
                 </a:solidFill>
-                <a:latin typeface="Karla" pitchFamily="34" charset="0"/>
-                <a:ea typeface="Karla" pitchFamily="34" charset="-122"/>
-                <a:cs typeface="Karla" pitchFamily="34" charset="-120"/>
+                <a:latin typeface="Calibri" pitchFamily="34" charset="0"/>
+                <a:ea typeface="Calibri" pitchFamily="34" charset="-122"/>
+                <a:cs typeface="Calibri" pitchFamily="34" charset="-120"/>
               </a:rPr>
               <a:t>THE PASTORAL GUIDE</a:t>
             </a:r>
@@ -5155,9 +5155,9 @@
                 <a:solidFill>
                   <a:srgbClr val="C28F38"/>
                 </a:solidFill>
-                <a:latin typeface="Karla" pitchFamily="34" charset="0"/>
-                <a:ea typeface="Karla" pitchFamily="34" charset="-122"/>
-                <a:cs typeface="Karla" pitchFamily="34" charset="-120"/>
+                <a:latin typeface="Calibri" pitchFamily="34" charset="0"/>
+                <a:ea typeface="Calibri" pitchFamily="34" charset="-122"/>
+                <a:cs typeface="Calibri" pitchFamily="34" charset="-120"/>
               </a:rPr>
               <a:t>HOW DOES SCREEN TIME AFFECT…?</a:t>
             </a:r>
@@ -5190,13 +5190,13 @@
               <a:buNone/>
             </a:pPr>
             <a:r>
-              <a:rPr lang="en-US" sz="5000" b="1" dirty="0">
+              <a:rPr lang="en-US" sz="5000" b="0" dirty="0">
                 <a:solidFill>
                   <a:srgbClr val="2E4436"/>
                 </a:solidFill>
-                <a:latin typeface="Libre Caslon Display" pitchFamily="34" charset="0"/>
-                <a:ea typeface="Libre Caslon Display" pitchFamily="34" charset="-122"/>
-                <a:cs typeface="Libre Caslon Display" pitchFamily="34" charset="-120"/>
+                <a:latin typeface="Georgia" pitchFamily="34" charset="0"/>
+                <a:ea typeface="Georgia" pitchFamily="34" charset="-122"/>
+                <a:cs typeface="Georgia" pitchFamily="34" charset="-120"/>
               </a:rPr>
               <a:t>Halfway Check-in</a:t>
             </a:r>
@@ -5233,9 +5233,9 @@
                 <a:solidFill>
                   <a:srgbClr val="C28F38"/>
                 </a:solidFill>
-                <a:latin typeface="Karla" pitchFamily="34" charset="0"/>
-                <a:ea typeface="Karla" pitchFamily="34" charset="-122"/>
-                <a:cs typeface="Karla" pitchFamily="34" charset="-120"/>
+                <a:latin typeface="Calibri" pitchFamily="34" charset="0"/>
+                <a:ea typeface="Calibri" pitchFamily="34" charset="-122"/>
+                <a:cs typeface="Calibri" pitchFamily="34" charset="-120"/>
               </a:rPr>
               <a:t>Session 2 of 3  ·  the tracker is roughly halfway through the term</a:t>
             </a:r>
@@ -5328,9 +5328,9 @@
                 <a:solidFill>
                   <a:srgbClr val="8B9179"/>
                 </a:solidFill>
-                <a:latin typeface="Karla" pitchFamily="34" charset="0"/>
-                <a:ea typeface="Karla" pitchFamily="34" charset="-122"/>
-                <a:cs typeface="Karla" pitchFamily="34" charset="-120"/>
+                <a:latin typeface="Calibri" pitchFamily="34" charset="0"/>
+                <a:ea typeface="Calibri" pitchFamily="34" charset="-122"/>
+                <a:cs typeface="Calibri" pitchFamily="34" charset="-120"/>
               </a:rPr>
               <a:t>THE PASTORAL GUIDE</a:t>
             </a:r>
@@ -5367,9 +5367,9 @@
                 <a:solidFill>
                   <a:srgbClr val="C28F38"/>
                 </a:solidFill>
-                <a:latin typeface="Karla" pitchFamily="34" charset="0"/>
-                <a:ea typeface="Karla" pitchFamily="34" charset="-122"/>
-                <a:cs typeface="Karla" pitchFamily="34" charset="-120"/>
+                <a:latin typeface="Calibri" pitchFamily="34" charset="0"/>
+                <a:ea typeface="Calibri" pitchFamily="34" charset="-122"/>
+                <a:cs typeface="Calibri" pitchFamily="34" charset="-120"/>
               </a:rPr>
               <a:t>A QUICK REMINDER</a:t>
             </a:r>
@@ -5402,13 +5402,13 @@
               <a:buNone/>
             </a:pPr>
             <a:r>
-              <a:rPr lang="en-US" sz="3000" b="1" dirty="0">
+              <a:rPr lang="en-US" sz="3000" b="0" dirty="0">
                 <a:solidFill>
                   <a:srgbClr val="2E4436"/>
                 </a:solidFill>
-                <a:latin typeface="Libre Caslon Display" pitchFamily="34" charset="0"/>
-                <a:ea typeface="Libre Caslon Display" pitchFamily="34" charset="-122"/>
-                <a:cs typeface="Libre Caslon Display" pitchFamily="34" charset="-120"/>
+                <a:latin typeface="Georgia" pitchFamily="34" charset="0"/>
+                <a:ea typeface="Georgia" pitchFamily="34" charset="-122"/>
+                <a:cs typeface="Georgia" pitchFamily="34" charset="-120"/>
               </a:rPr>
               <a:t>What the research said</a:t>
             </a:r>
@@ -5493,9 +5493,9 @@
                 <a:solidFill>
                   <a:srgbClr val="5C6552"/>
                 </a:solidFill>
-                <a:latin typeface="Karla" pitchFamily="34" charset="0"/>
-                <a:ea typeface="Karla" pitchFamily="34" charset="-122"/>
-                <a:cs typeface="Karla" pitchFamily="34" charset="-120"/>
+                <a:latin typeface="Calibri" pitchFamily="34" charset="0"/>
+                <a:ea typeface="Calibri" pitchFamily="34" charset="-122"/>
+                <a:cs typeface="Calibri" pitchFamily="34" charset="-120"/>
               </a:rPr>
               <a:t>Higher screen time was linked to changes in brain regions supporting focus and self-control (Shou et al., 2025).</a:t>
             </a:r>
@@ -5580,9 +5580,9 @@
                 <a:solidFill>
                   <a:srgbClr val="5C6552"/>
                 </a:solidFill>
-                <a:latin typeface="Karla" pitchFamily="34" charset="0"/>
-                <a:ea typeface="Karla" pitchFamily="34" charset="-122"/>
-                <a:cs typeface="Karla" pitchFamily="34" charset="-120"/>
+                <a:latin typeface="Calibri" pitchFamily="34" charset="0"/>
+                <a:ea typeface="Calibri" pitchFamily="34" charset="-122"/>
+                <a:cs typeface="Calibri" pitchFamily="34" charset="-120"/>
               </a:rPr>
               <a:t>Heavier social media use was linked to weaker impulse control years later (Wallace et al., 2023).</a:t>
             </a:r>
@@ -5667,9 +5667,9 @@
                 <a:solidFill>
                   <a:srgbClr val="5C6552"/>
                 </a:solidFill>
-                <a:latin typeface="Karla" pitchFamily="34" charset="0"/>
-                <a:ea typeface="Karla" pitchFamily="34" charset="-122"/>
-                <a:cs typeface="Karla" pitchFamily="34" charset="-120"/>
+                <a:latin typeface="Calibri" pitchFamily="34" charset="0"/>
+                <a:ea typeface="Calibri" pitchFamily="34" charset="-122"/>
+                <a:cs typeface="Calibri" pitchFamily="34" charset="-120"/>
               </a:rPr>
               <a:t>More screen time was linked to lower grades, especially from gaming and scrolling (Feng et al., 2025).</a:t>
             </a:r>
@@ -5754,9 +5754,9 @@
                 <a:solidFill>
                   <a:srgbClr val="5C6552"/>
                 </a:solidFill>
-                <a:latin typeface="Karla" pitchFamily="34" charset="0"/>
-                <a:ea typeface="Karla" pitchFamily="34" charset="-122"/>
-                <a:cs typeface="Karla" pitchFamily="34" charset="-120"/>
+                <a:latin typeface="Calibri" pitchFamily="34" charset="0"/>
+                <a:ea typeface="Calibri" pitchFamily="34" charset="-122"/>
+                <a:cs typeface="Calibri" pitchFamily="34" charset="-120"/>
               </a:rPr>
               <a:t>More screen time was linked to worse sleep within just three months (Hökby et al., 2025).</a:t>
             </a:r>
@@ -5849,9 +5849,9 @@
                 <a:solidFill>
                   <a:srgbClr val="8B9179"/>
                 </a:solidFill>
-                <a:latin typeface="Karla" pitchFamily="34" charset="0"/>
-                <a:ea typeface="Karla" pitchFamily="34" charset="-122"/>
-                <a:cs typeface="Karla" pitchFamily="34" charset="-120"/>
+                <a:latin typeface="Calibri" pitchFamily="34" charset="0"/>
+                <a:ea typeface="Calibri" pitchFamily="34" charset="-122"/>
+                <a:cs typeface="Calibri" pitchFamily="34" charset="-120"/>
               </a:rPr>
               <a:t>THE PASTORAL GUIDE</a:t>
             </a:r>
@@ -5888,9 +5888,9 @@
                 <a:solidFill>
                   <a:srgbClr val="C28F38"/>
                 </a:solidFill>
-                <a:latin typeface="Karla" pitchFamily="34" charset="0"/>
-                <a:ea typeface="Karla" pitchFamily="34" charset="-122"/>
-                <a:cs typeface="Karla" pitchFamily="34" charset="-120"/>
+                <a:latin typeface="Calibri" pitchFamily="34" charset="0"/>
+                <a:ea typeface="Calibri" pitchFamily="34" charset="-122"/>
+                <a:cs typeface="Calibri" pitchFamily="34" charset="-120"/>
               </a:rPr>
               <a:t>ACTIVITY 3 · DO THIS NOW</a:t>
             </a:r>
@@ -5949,13 +5949,13 @@
               <a:buNone/>
             </a:pPr>
             <a:r>
-              <a:rPr lang="en-US" sz="2600" b="1" dirty="0">
+              <a:rPr lang="en-US" sz="2600" b="0" dirty="0">
                 <a:solidFill>
                   <a:srgbClr val="2E4436"/>
                 </a:solidFill>
-                <a:latin typeface="Libre Caslon Display" pitchFamily="34" charset="0"/>
-                <a:ea typeface="Libre Caslon Display" pitchFamily="34" charset="-122"/>
-                <a:cs typeface="Libre Caslon Display" pitchFamily="34" charset="-120"/>
+                <a:latin typeface="Georgia" pitchFamily="34" charset="0"/>
+                <a:ea typeface="Georgia" pitchFamily="34" charset="-122"/>
+                <a:cs typeface="Georgia" pitchFamily="34" charset="-120"/>
               </a:rPr>
               <a:t>Midpoint Reflection</a:t>
             </a:r>
@@ -5992,9 +5992,9 @@
                 <a:solidFill>
                   <a:srgbClr val="5C6552"/>
                 </a:solidFill>
-                <a:latin typeface="Karla" pitchFamily="34" charset="0"/>
-                <a:ea typeface="Karla" pitchFamily="34" charset="-122"/>
-                <a:cs typeface="Karla" pitchFamily="34" charset="-120"/>
+                <a:latin typeface="Calibri" pitchFamily="34" charset="0"/>
+                <a:ea typeface="Calibri" pitchFamily="34" charset="-122"/>
+                <a:cs typeface="Calibri" pitchFamily="34" charset="-120"/>
               </a:rPr>
               <a:t>Get out your Activity 1 reflection and reduction plan from session 1, and compare honestly.</a:t>
             </a:r>
@@ -6055,9 +6055,9 @@
                 <a:solidFill>
                   <a:srgbClr val="FFFFFF"/>
                 </a:solidFill>
-                <a:latin typeface="Karla" pitchFamily="34" charset="0"/>
-                <a:ea typeface="Karla" pitchFamily="34" charset="-122"/>
-                <a:cs typeface="Karla" pitchFamily="34" charset="-120"/>
+                <a:latin typeface="Calibri" pitchFamily="34" charset="0"/>
+                <a:ea typeface="Calibri" pitchFamily="34" charset="-122"/>
+                <a:cs typeface="Calibri" pitchFamily="34" charset="-120"/>
               </a:rPr>
               <a:t>1</a:t>
             </a:r>
@@ -6094,9 +6094,9 @@
                 <a:solidFill>
                   <a:srgbClr val="2E4436"/>
                 </a:solidFill>
-                <a:latin typeface="Karla" pitchFamily="34" charset="0"/>
-                <a:ea typeface="Karla" pitchFamily="34" charset="-122"/>
-                <a:cs typeface="Karla" pitchFamily="34" charset="-120"/>
+                <a:latin typeface="Calibri" pitchFamily="34" charset="0"/>
+                <a:ea typeface="Calibri" pitchFamily="34" charset="-122"/>
+                <a:cs typeface="Calibri" pitchFamily="34" charset="-120"/>
               </a:rPr>
               <a:t>What has my screen time actually been like these past few weeks?</a:t>
             </a:r>
@@ -6184,9 +6184,9 @@
                 <a:solidFill>
                   <a:srgbClr val="FFFFFF"/>
                 </a:solidFill>
-                <a:latin typeface="Karla" pitchFamily="34" charset="0"/>
-                <a:ea typeface="Karla" pitchFamily="34" charset="-122"/>
-                <a:cs typeface="Karla" pitchFamily="34" charset="-120"/>
+                <a:latin typeface="Calibri" pitchFamily="34" charset="0"/>
+                <a:ea typeface="Calibri" pitchFamily="34" charset="-122"/>
+                <a:cs typeface="Calibri" pitchFamily="34" charset="-120"/>
               </a:rPr>
               <a:t>2</a:t>
             </a:r>
@@ -6223,9 +6223,9 @@
                 <a:solidFill>
                   <a:srgbClr val="2E4436"/>
                 </a:solidFill>
-                <a:latin typeface="Karla" pitchFamily="34" charset="0"/>
-                <a:ea typeface="Karla" pitchFamily="34" charset="-122"/>
-                <a:cs typeface="Karla" pitchFamily="34" charset="-120"/>
+                <a:latin typeface="Calibri" pitchFamily="34" charset="0"/>
+                <a:ea typeface="Calibri" pitchFamily="34" charset="-122"/>
+                <a:cs typeface="Calibri" pitchFamily="34" charset="-120"/>
               </a:rPr>
               <a:t>Did I stick to my reduction plan? What helped, and what got in the way?</a:t>
             </a:r>
@@ -6313,9 +6313,9 @@
                 <a:solidFill>
                   <a:srgbClr val="FFFFFF"/>
                 </a:solidFill>
-                <a:latin typeface="Karla" pitchFamily="34" charset="0"/>
-                <a:ea typeface="Karla" pitchFamily="34" charset="-122"/>
-                <a:cs typeface="Karla" pitchFamily="34" charset="-120"/>
+                <a:latin typeface="Calibri" pitchFamily="34" charset="0"/>
+                <a:ea typeface="Calibri" pitchFamily="34" charset="-122"/>
+                <a:cs typeface="Calibri" pitchFamily="34" charset="-120"/>
               </a:rPr>
               <a:t>3</a:t>
             </a:r>
@@ -6352,9 +6352,9 @@
                 <a:solidFill>
                   <a:srgbClr val="2E4436"/>
                 </a:solidFill>
-                <a:latin typeface="Karla" pitchFamily="34" charset="0"/>
-                <a:ea typeface="Karla" pitchFamily="34" charset="-122"/>
-                <a:cs typeface="Karla" pitchFamily="34" charset="-120"/>
+                <a:latin typeface="Calibri" pitchFamily="34" charset="0"/>
+                <a:ea typeface="Calibri" pitchFamily="34" charset="-122"/>
+                <a:cs typeface="Calibri" pitchFamily="34" charset="-120"/>
               </a:rPr>
               <a:t>What’s one thing that’s improved: sleep, focus, mood, or something else?</a:t>
             </a:r>
@@ -6442,9 +6442,9 @@
                 <a:solidFill>
                   <a:srgbClr val="FFFFFF"/>
                 </a:solidFill>
-                <a:latin typeface="Karla" pitchFamily="34" charset="0"/>
-                <a:ea typeface="Karla" pitchFamily="34" charset="-122"/>
-                <a:cs typeface="Karla" pitchFamily="34" charset="-120"/>
+                <a:latin typeface="Calibri" pitchFamily="34" charset="0"/>
+                <a:ea typeface="Calibri" pitchFamily="34" charset="-122"/>
+                <a:cs typeface="Calibri" pitchFamily="34" charset="-120"/>
               </a:rPr>
               <a:t>4</a:t>
             </a:r>
@@ -6481,9 +6481,9 @@
                 <a:solidFill>
                   <a:srgbClr val="2E4436"/>
                 </a:solidFill>
-                <a:latin typeface="Karla" pitchFamily="34" charset="0"/>
-                <a:ea typeface="Karla" pitchFamily="34" charset="-122"/>
-                <a:cs typeface="Karla" pitchFamily="34" charset="-120"/>
+                <a:latin typeface="Calibri" pitchFamily="34" charset="0"/>
+                <a:ea typeface="Calibri" pitchFamily="34" charset="-122"/>
+                <a:cs typeface="Calibri" pitchFamily="34" charset="-120"/>
               </a:rPr>
               <a:t>What will I adjust for the rest of the term?</a:t>
             </a:r>
@@ -6520,9 +6520,9 @@
                 <a:solidFill>
                   <a:srgbClr val="C28F38"/>
                 </a:solidFill>
-                <a:latin typeface="Karla" pitchFamily="34" charset="0"/>
-                <a:ea typeface="Karla" pitchFamily="34" charset="-122"/>
-                <a:cs typeface="Karla" pitchFamily="34" charset="-120"/>
+                <a:latin typeface="Calibri" pitchFamily="34" charset="0"/>
+                <a:ea typeface="Calibri" pitchFamily="34" charset="-122"/>
+                <a:cs typeface="Calibri" pitchFamily="34" charset="-120"/>
               </a:rPr>
               <a:t>Printable worksheet version: Midpoint Reflection (PDF)</a:t>
             </a:r>
@@ -6559,9 +6559,9 @@
                 <a:solidFill>
                   <a:srgbClr val="C28F38"/>
                 </a:solidFill>
-                <a:latin typeface="Karla" pitchFamily="34" charset="0"/>
-                <a:ea typeface="Karla" pitchFamily="34" charset="-122"/>
-                <a:cs typeface="Karla" pitchFamily="34" charset="-120"/>
+                <a:latin typeface="Calibri" pitchFamily="34" charset="0"/>
+                <a:ea typeface="Calibri" pitchFamily="34" charset="-122"/>
+                <a:cs typeface="Calibri" pitchFamily="34" charset="-120"/>
               </a:rPr>
               <a:t>SESSION 2</a:t>
             </a:r>
@@ -6654,9 +6654,9 @@
                 <a:solidFill>
                   <a:srgbClr val="8B9179"/>
                 </a:solidFill>
-                <a:latin typeface="Karla" pitchFamily="34" charset="0"/>
-                <a:ea typeface="Karla" pitchFamily="34" charset="-122"/>
-                <a:cs typeface="Karla" pitchFamily="34" charset="-120"/>
+                <a:latin typeface="Calibri" pitchFamily="34" charset="0"/>
+                <a:ea typeface="Calibri" pitchFamily="34" charset="-122"/>
+                <a:cs typeface="Calibri" pitchFamily="34" charset="-120"/>
               </a:rPr>
               <a:t>THE PASTORAL GUIDE</a:t>
             </a:r>
@@ -6693,9 +6693,9 @@
                 <a:solidFill>
                   <a:srgbClr val="C28F38"/>
                 </a:solidFill>
-                <a:latin typeface="Karla" pitchFamily="34" charset="0"/>
-                <a:ea typeface="Karla" pitchFamily="34" charset="-122"/>
-                <a:cs typeface="Karla" pitchFamily="34" charset="-120"/>
+                <a:latin typeface="Calibri" pitchFamily="34" charset="0"/>
+                <a:ea typeface="Calibri" pitchFamily="34" charset="-122"/>
+                <a:cs typeface="Calibri" pitchFamily="34" charset="-120"/>
               </a:rPr>
               <a:t>STILL TO COME</a:t>
             </a:r>
@@ -6728,13 +6728,13 @@
               <a:buNone/>
             </a:pPr>
             <a:r>
-              <a:rPr lang="en-US" sz="3000" b="1" dirty="0">
+              <a:rPr lang="en-US" sz="3000" b="0" dirty="0">
                 <a:solidFill>
                   <a:srgbClr val="2E4436"/>
                 </a:solidFill>
-                <a:latin typeface="Libre Caslon Display" pitchFamily="34" charset="0"/>
-                <a:ea typeface="Libre Caslon Display" pitchFamily="34" charset="-122"/>
-                <a:cs typeface="Libre Caslon Display" pitchFamily="34" charset="-120"/>
+                <a:latin typeface="Georgia" pitchFamily="34" charset="0"/>
+                <a:ea typeface="Georgia" pitchFamily="34" charset="-122"/>
+                <a:cs typeface="Georgia" pitchFamily="34" charset="-120"/>
               </a:rPr>
               <a:t>Looking ahead to the end of term</a:t>
             </a:r>
@@ -6771,9 +6771,9 @@
                 <a:solidFill>
                   <a:srgbClr val="5C6552"/>
                 </a:solidFill>
-                <a:latin typeface="Karla" pitchFamily="34" charset="0"/>
-                <a:ea typeface="Karla" pitchFamily="34" charset="-122"/>
-                <a:cs typeface="Karla" pitchFamily="34" charset="-120"/>
+                <a:latin typeface="Calibri" pitchFamily="34" charset="0"/>
+                <a:ea typeface="Calibri" pitchFamily="34" charset="-122"/>
+                <a:cs typeface="Calibri" pitchFamily="34" charset="-120"/>
               </a:rPr>
               <a:t>Keep logging with your teacher every week. At the end of term, you’ll do one last reflection and find out who’s won the two awards.</a:t>
             </a:r>
@@ -6880,13 +6880,13 @@
               <a:buNone/>
             </a:pPr>
             <a:r>
-              <a:rPr lang="en-US" sz="1700" b="1" dirty="0">
+              <a:rPr lang="en-US" sz="1700" b="0" dirty="0">
                 <a:solidFill>
                   <a:srgbClr val="2E4436"/>
                 </a:solidFill>
-                <a:latin typeface="Libre Caslon Display" pitchFamily="34" charset="0"/>
-                <a:ea typeface="Libre Caslon Display" pitchFamily="34" charset="-122"/>
-                <a:cs typeface="Libre Caslon Display" pitchFamily="34" charset="-120"/>
+                <a:latin typeface="Georgia" pitchFamily="34" charset="0"/>
+                <a:ea typeface="Georgia" pitchFamily="34" charset="-122"/>
+                <a:cs typeface="Georgia" pitchFamily="34" charset="-120"/>
               </a:rPr>
               <a:t>Lowest total screen time</a:t>
             </a:r>
@@ -6923,9 +6923,9 @@
                 <a:solidFill>
                   <a:srgbClr val="5C6552"/>
                 </a:solidFill>
-                <a:latin typeface="Karla" pitchFamily="34" charset="0"/>
-                <a:ea typeface="Karla" pitchFamily="34" charset="-122"/>
-                <a:cs typeface="Karla" pitchFamily="34" charset="-120"/>
+                <a:latin typeface="Calibri" pitchFamily="34" charset="0"/>
+                <a:ea typeface="Calibri" pitchFamily="34" charset="-122"/>
+                <a:cs typeface="Calibri" pitchFamily="34" charset="-120"/>
               </a:rPr>
               <a:t>Across every week logged in the tracker this term.</a:t>
             </a:r>
@@ -7032,13 +7032,13 @@
               <a:buNone/>
             </a:pPr>
             <a:r>
-              <a:rPr lang="en-US" sz="1700" b="1" dirty="0">
+              <a:rPr lang="en-US" sz="1700" b="0" dirty="0">
                 <a:solidFill>
                   <a:srgbClr val="2E4436"/>
                 </a:solidFill>
-                <a:latin typeface="Libre Caslon Display" pitchFamily="34" charset="0"/>
-                <a:ea typeface="Libre Caslon Display" pitchFamily="34" charset="-122"/>
-                <a:cs typeface="Libre Caslon Display" pitchFamily="34" charset="-120"/>
+                <a:latin typeface="Georgia" pitchFamily="34" charset="0"/>
+                <a:ea typeface="Georgia" pitchFamily="34" charset="-122"/>
+                <a:cs typeface="Georgia" pitchFamily="34" charset="-120"/>
               </a:rPr>
               <a:t>Most reduced screen time</a:t>
             </a:r>
@@ -7075,9 +7075,9 @@
                 <a:solidFill>
                   <a:srgbClr val="5C6552"/>
                 </a:solidFill>
-                <a:latin typeface="Karla" pitchFamily="34" charset="0"/>
-                <a:ea typeface="Karla" pitchFamily="34" charset="-122"/>
-                <a:cs typeface="Karla" pitchFamily="34" charset="-120"/>
+                <a:latin typeface="Calibri" pitchFamily="34" charset="0"/>
+                <a:ea typeface="Calibri" pitchFamily="34" charset="-122"/>
+                <a:cs typeface="Calibri" pitchFamily="34" charset="-120"/>
               </a:rPr>
               <a:t>The steepest downward trend from week one to the end of term.</a:t>
             </a:r>
@@ -7194,9 +7194,9 @@
                 <a:solidFill>
                   <a:srgbClr val="8B9179"/>
                 </a:solidFill>
-                <a:latin typeface="Karla" pitchFamily="34" charset="0"/>
-                <a:ea typeface="Karla" pitchFamily="34" charset="-122"/>
-                <a:cs typeface="Karla" pitchFamily="34" charset="-120"/>
+                <a:latin typeface="Calibri" pitchFamily="34" charset="0"/>
+                <a:ea typeface="Calibri" pitchFamily="34" charset="-122"/>
+                <a:cs typeface="Calibri" pitchFamily="34" charset="-120"/>
               </a:rPr>
               <a:t>THE PASTORAL GUIDE</a:t>
             </a:r>
@@ -7233,9 +7233,9 @@
                 <a:solidFill>
                   <a:srgbClr val="C28F38"/>
                 </a:solidFill>
-                <a:latin typeface="Karla" pitchFamily="34" charset="0"/>
-                <a:ea typeface="Karla" pitchFamily="34" charset="-122"/>
-                <a:cs typeface="Karla" pitchFamily="34" charset="-120"/>
+                <a:latin typeface="Calibri" pitchFamily="34" charset="0"/>
+                <a:ea typeface="Calibri" pitchFamily="34" charset="-122"/>
+                <a:cs typeface="Calibri" pitchFamily="34" charset="-120"/>
               </a:rPr>
               <a:t>HOW DOES SCREEN TIME AFFECT…?</a:t>
             </a:r>
@@ -7268,13 +7268,13 @@
               <a:buNone/>
             </a:pPr>
             <a:r>
-              <a:rPr lang="en-US" sz="5000" b="1" dirty="0">
+              <a:rPr lang="en-US" sz="5000" b="0" dirty="0">
                 <a:solidFill>
                   <a:srgbClr val="2E4436"/>
                 </a:solidFill>
-                <a:latin typeface="Libre Caslon Display" pitchFamily="34" charset="0"/>
-                <a:ea typeface="Libre Caslon Display" pitchFamily="34" charset="-122"/>
-                <a:cs typeface="Libre Caslon Display" pitchFamily="34" charset="-120"/>
+                <a:latin typeface="Georgia" pitchFamily="34" charset="0"/>
+                <a:ea typeface="Georgia" pitchFamily="34" charset="-122"/>
+                <a:cs typeface="Georgia" pitchFamily="34" charset="-120"/>
               </a:rPr>
               <a:t>End of Term</a:t>
             </a:r>
@@ -7311,9 +7311,9 @@
                 <a:solidFill>
                   <a:srgbClr val="C28F38"/>
                 </a:solidFill>
-                <a:latin typeface="Karla" pitchFamily="34" charset="0"/>
-                <a:ea typeface="Karla" pitchFamily="34" charset="-122"/>
-                <a:cs typeface="Karla" pitchFamily="34" charset="-120"/>
+                <a:latin typeface="Calibri" pitchFamily="34" charset="0"/>
+                <a:ea typeface="Calibri" pitchFamily="34" charset="-122"/>
+                <a:cs typeface="Calibri" pitchFamily="34" charset="-120"/>
               </a:rPr>
               <a:t>Session 3 of 3  ·  final reflection, then the tracker closes and the awards are revealed</a:t>
             </a:r>
@@ -7406,9 +7406,9 @@
                 <a:solidFill>
                   <a:srgbClr val="8B9179"/>
                 </a:solidFill>
-                <a:latin typeface="Karla" pitchFamily="34" charset="0"/>
-                <a:ea typeface="Karla" pitchFamily="34" charset="-122"/>
-                <a:cs typeface="Karla" pitchFamily="34" charset="-120"/>
+                <a:latin typeface="Calibri" pitchFamily="34" charset="0"/>
+                <a:ea typeface="Calibri" pitchFamily="34" charset="-122"/>
+                <a:cs typeface="Calibri" pitchFamily="34" charset="-120"/>
               </a:rPr>
               <a:t>THE PASTORAL GUIDE</a:t>
             </a:r>
@@ -7445,9 +7445,9 @@
                 <a:solidFill>
                   <a:srgbClr val="C28F38"/>
                 </a:solidFill>
-                <a:latin typeface="Karla" pitchFamily="34" charset="0"/>
-                <a:ea typeface="Karla" pitchFamily="34" charset="-122"/>
-                <a:cs typeface="Karla" pitchFamily="34" charset="-120"/>
+                <a:latin typeface="Calibri" pitchFamily="34" charset="0"/>
+                <a:ea typeface="Calibri" pitchFamily="34" charset="-122"/>
+                <a:cs typeface="Calibri" pitchFamily="34" charset="-120"/>
               </a:rPr>
               <a:t>ACTIVITY 4 · DO THIS NOW</a:t>
             </a:r>
@@ -7506,13 +7506,13 @@
               <a:buNone/>
             </a:pPr>
             <a:r>
-              <a:rPr lang="en-US" sz="2600" b="1" dirty="0">
+              <a:rPr lang="en-US" sz="2600" b="0" dirty="0">
                 <a:solidFill>
                   <a:srgbClr val="2E4436"/>
                 </a:solidFill>
-                <a:latin typeface="Libre Caslon Display" pitchFamily="34" charset="0"/>
-                <a:ea typeface="Libre Caslon Display" pitchFamily="34" charset="-122"/>
-                <a:cs typeface="Libre Caslon Display" pitchFamily="34" charset="-120"/>
+                <a:latin typeface="Georgia" pitchFamily="34" charset="0"/>
+                <a:ea typeface="Georgia" pitchFamily="34" charset="-122"/>
+                <a:cs typeface="Georgia" pitchFamily="34" charset="-120"/>
               </a:rPr>
               <a:t>Final Reflection</a:t>
             </a:r>
@@ -7549,9 +7549,9 @@
                 <a:solidFill>
                   <a:srgbClr val="5C6552"/>
                 </a:solidFill>
-                <a:latin typeface="Karla" pitchFamily="34" charset="0"/>
-                <a:ea typeface="Karla" pitchFamily="34" charset="-122"/>
-                <a:cs typeface="Karla" pitchFamily="34" charset="-120"/>
+                <a:latin typeface="Calibri" pitchFamily="34" charset="0"/>
+                <a:ea typeface="Calibri" pitchFamily="34" charset="-122"/>
+                <a:cs typeface="Calibri" pitchFamily="34" charset="-120"/>
               </a:rPr>
               <a:t>Get out your sheets from session 1 and the halfway check-in, and look back over the whole term.</a:t>
             </a:r>
@@ -7612,9 +7612,9 @@
                 <a:solidFill>
                   <a:srgbClr val="FFFFFF"/>
                 </a:solidFill>
-                <a:latin typeface="Karla" pitchFamily="34" charset="0"/>
-                <a:ea typeface="Karla" pitchFamily="34" charset="-122"/>
-                <a:cs typeface="Karla" pitchFamily="34" charset="-120"/>
+                <a:latin typeface="Calibri" pitchFamily="34" charset="0"/>
+                <a:ea typeface="Calibri" pitchFamily="34" charset="-122"/>
+                <a:cs typeface="Calibri" pitchFamily="34" charset="-120"/>
               </a:rPr>
               <a:t>1</a:t>
             </a:r>
@@ -7651,9 +7651,9 @@
                 <a:solidFill>
                   <a:srgbClr val="2E4436"/>
                 </a:solidFill>
-                <a:latin typeface="Karla" pitchFamily="34" charset="0"/>
-                <a:ea typeface="Karla" pitchFamily="34" charset="-122"/>
-                <a:cs typeface="Karla" pitchFamily="34" charset="-120"/>
+                <a:latin typeface="Calibri" pitchFamily="34" charset="0"/>
+                <a:ea typeface="Calibri" pitchFamily="34" charset="-122"/>
+                <a:cs typeface="Calibri" pitchFamily="34" charset="-120"/>
               </a:rPr>
               <a:t>Looking back at your first reflection and your plan, how has your screen time changed this term?</a:t>
             </a:r>
@@ -7741,9 +7741,9 @@
                 <a:solidFill>
                   <a:srgbClr val="FFFFFF"/>
                 </a:solidFill>
-                <a:latin typeface="Karla" pitchFamily="34" charset="0"/>
-                <a:ea typeface="Karla" pitchFamily="34" charset="-122"/>
-                <a:cs typeface="Karla" pitchFamily="34" charset="-120"/>
+                <a:latin typeface="Calibri" pitchFamily="34" charset="0"/>
+                <a:ea typeface="Calibri" pitchFamily="34" charset="-122"/>
+                <a:cs typeface="Calibri" pitchFamily="34" charset="-120"/>
               </a:rPr>
               <a:t>2</a:t>
             </a:r>
@@ -7780,9 +7780,9 @@
                 <a:solidFill>
                   <a:srgbClr val="2E4436"/>
                 </a:solidFill>
-                <a:latin typeface="Karla" pitchFamily="34" charset="0"/>
-                <a:ea typeface="Karla" pitchFamily="34" charset="-122"/>
-                <a:cs typeface="Karla" pitchFamily="34" charset="-120"/>
+                <a:latin typeface="Calibri" pitchFamily="34" charset="0"/>
+                <a:ea typeface="Calibri" pitchFamily="34" charset="-122"/>
+                <a:cs typeface="Calibri" pitchFamily="34" charset="-120"/>
               </a:rPr>
               <a:t>What’s the biggest difference you’ve noticed: sleep, focus, mood, or something else?</a:t>
             </a:r>
@@ -7870,9 +7870,9 @@
                 <a:solidFill>
                   <a:srgbClr val="FFFFFF"/>
                 </a:solidFill>
-                <a:latin typeface="Karla" pitchFamily="34" charset="0"/>
-                <a:ea typeface="Karla" pitchFamily="34" charset="-122"/>
-                <a:cs typeface="Karla" pitchFamily="34" charset="-120"/>
+                <a:latin typeface="Calibri" pitchFamily="34" charset="0"/>
+                <a:ea typeface="Calibri" pitchFamily="34" charset="-122"/>
+                <a:cs typeface="Calibri" pitchFamily="34" charset="-120"/>
               </a:rPr>
               <a:t>3</a:t>
             </a:r>
@@ -7909,9 +7909,9 @@
                 <a:solidFill>
                   <a:srgbClr val="2E4436"/>
                 </a:solidFill>
-                <a:latin typeface="Karla" pitchFamily="34" charset="0"/>
-                <a:ea typeface="Karla" pitchFamily="34" charset="-122"/>
-                <a:cs typeface="Karla" pitchFamily="34" charset="-120"/>
+                <a:latin typeface="Calibri" pitchFamily="34" charset="0"/>
+                <a:ea typeface="Calibri" pitchFamily="34" charset="-122"/>
+                <a:cs typeface="Calibri" pitchFamily="34" charset="-120"/>
               </a:rPr>
               <a:t>Which part of your plan worked best, and which part didn’t stick?</a:t>
             </a:r>
@@ -7999,9 +7999,9 @@
                 <a:solidFill>
                   <a:srgbClr val="FFFFFF"/>
                 </a:solidFill>
-                <a:latin typeface="Karla" pitchFamily="34" charset="0"/>
-                <a:ea typeface="Karla" pitchFamily="34" charset="-122"/>
-                <a:cs typeface="Karla" pitchFamily="34" charset="-120"/>
+                <a:latin typeface="Calibri" pitchFamily="34" charset="0"/>
+                <a:ea typeface="Calibri" pitchFamily="34" charset="-122"/>
+                <a:cs typeface="Calibri" pitchFamily="34" charset="-120"/>
               </a:rPr>
               <a:t>4</a:t>
             </a:r>
@@ -8038,9 +8038,9 @@
                 <a:solidFill>
                   <a:srgbClr val="2E4436"/>
                 </a:solidFill>
-                <a:latin typeface="Karla" pitchFamily="34" charset="0"/>
-                <a:ea typeface="Karla" pitchFamily="34" charset="-122"/>
-                <a:cs typeface="Karla" pitchFamily="34" charset="-120"/>
+                <a:latin typeface="Calibri" pitchFamily="34" charset="0"/>
+                <a:ea typeface="Calibri" pitchFamily="34" charset="-122"/>
+                <a:cs typeface="Calibri" pitchFamily="34" charset="-120"/>
               </a:rPr>
               <a:t>What’s one screen habit you want to keep going next term?</a:t>
             </a:r>
@@ -8077,9 +8077,9 @@
                 <a:solidFill>
                   <a:srgbClr val="C28F38"/>
                 </a:solidFill>
-                <a:latin typeface="Karla" pitchFamily="34" charset="0"/>
-                <a:ea typeface="Karla" pitchFamily="34" charset="-122"/>
-                <a:cs typeface="Karla" pitchFamily="34" charset="-120"/>
+                <a:latin typeface="Calibri" pitchFamily="34" charset="0"/>
+                <a:ea typeface="Calibri" pitchFamily="34" charset="-122"/>
+                <a:cs typeface="Calibri" pitchFamily="34" charset="-120"/>
               </a:rPr>
               <a:t>Printable worksheet version: Final Reflection (PDF)</a:t>
             </a:r>
@@ -8116,9 +8116,9 @@
                 <a:solidFill>
                   <a:srgbClr val="C28F38"/>
                 </a:solidFill>
-                <a:latin typeface="Karla" pitchFamily="34" charset="0"/>
-                <a:ea typeface="Karla" pitchFamily="34" charset="-122"/>
-                <a:cs typeface="Karla" pitchFamily="34" charset="-120"/>
+                <a:latin typeface="Calibri" pitchFamily="34" charset="0"/>
+                <a:ea typeface="Calibri" pitchFamily="34" charset="-122"/>
+                <a:cs typeface="Calibri" pitchFamily="34" charset="-120"/>
               </a:rPr>
               <a:t>SESSION 3</a:t>
             </a:r>
@@ -8211,9 +8211,9 @@
                 <a:solidFill>
                   <a:srgbClr val="8B9179"/>
                 </a:solidFill>
-                <a:latin typeface="Karla" pitchFamily="34" charset="0"/>
-                <a:ea typeface="Karla" pitchFamily="34" charset="-122"/>
-                <a:cs typeface="Karla" pitchFamily="34" charset="-120"/>
+                <a:latin typeface="Calibri" pitchFamily="34" charset="0"/>
+                <a:ea typeface="Calibri" pitchFamily="34" charset="-122"/>
+                <a:cs typeface="Calibri" pitchFamily="34" charset="-120"/>
               </a:rPr>
               <a:t>THE PASTORAL GUIDE</a:t>
             </a:r>
@@ -8250,9 +8250,9 @@
                 <a:solidFill>
                   <a:srgbClr val="C28F38"/>
                 </a:solidFill>
-                <a:latin typeface="Karla" pitchFamily="34" charset="0"/>
-                <a:ea typeface="Karla" pitchFamily="34" charset="-122"/>
-                <a:cs typeface="Karla" pitchFamily="34" charset="-120"/>
+                <a:latin typeface="Calibri" pitchFamily="34" charset="0"/>
+                <a:ea typeface="Calibri" pitchFamily="34" charset="-122"/>
+                <a:cs typeface="Calibri" pitchFamily="34" charset="-120"/>
               </a:rPr>
               <a:t>THE MOMENT YOU’VE BEEN TRACKING TOWARDS</a:t>
             </a:r>
@@ -8285,13 +8285,13 @@
               <a:buNone/>
             </a:pPr>
             <a:r>
-              <a:rPr lang="en-US" sz="3200" b="1" dirty="0">
+              <a:rPr lang="en-US" sz="3200" b="0" dirty="0">
                 <a:solidFill>
                   <a:srgbClr val="2E4436"/>
                 </a:solidFill>
-                <a:latin typeface="Libre Caslon Display" pitchFamily="34" charset="0"/>
-                <a:ea typeface="Libre Caslon Display" pitchFamily="34" charset="-122"/>
-                <a:cs typeface="Libre Caslon Display" pitchFamily="34" charset="-120"/>
+                <a:latin typeface="Georgia" pitchFamily="34" charset="0"/>
+                <a:ea typeface="Georgia" pitchFamily="34" charset="-122"/>
+                <a:cs typeface="Georgia" pitchFamily="34" charset="-120"/>
               </a:rPr>
               <a:t>This term’s awards</a:t>
             </a:r>
@@ -8398,13 +8398,13 @@
               <a:buNone/>
             </a:pPr>
             <a:r>
-              <a:rPr lang="en-US" sz="1800" b="1" dirty="0">
+              <a:rPr lang="en-US" sz="1800" b="0" dirty="0">
                 <a:solidFill>
                   <a:srgbClr val="2E4436"/>
                 </a:solidFill>
-                <a:latin typeface="Libre Caslon Display" pitchFamily="34" charset="0"/>
-                <a:ea typeface="Libre Caslon Display" pitchFamily="34" charset="-122"/>
-                <a:cs typeface="Libre Caslon Display" pitchFamily="34" charset="-120"/>
+                <a:latin typeface="Georgia" pitchFamily="34" charset="0"/>
+                <a:ea typeface="Georgia" pitchFamily="34" charset="-122"/>
+                <a:cs typeface="Georgia" pitchFamily="34" charset="-120"/>
               </a:rPr>
               <a:t>Lowest total screen time</a:t>
             </a:r>
@@ -8441,9 +8441,9 @@
                 <a:solidFill>
                   <a:srgbClr val="5C6552"/>
                 </a:solidFill>
-                <a:latin typeface="Karla" pitchFamily="34" charset="0"/>
-                <a:ea typeface="Karla" pitchFamily="34" charset="-122"/>
-                <a:cs typeface="Karla" pitchFamily="34" charset="-120"/>
+                <a:latin typeface="Calibri" pitchFamily="34" charset="0"/>
+                <a:ea typeface="Calibri" pitchFamily="34" charset="-122"/>
+                <a:cs typeface="Calibri" pitchFamily="34" charset="-120"/>
               </a:rPr>
               <a:t>Across every week logged in the tracker this term.</a:t>
             </a:r>
@@ -8550,13 +8550,13 @@
               <a:buNone/>
             </a:pPr>
             <a:r>
-              <a:rPr lang="en-US" sz="1800" b="1" dirty="0">
+              <a:rPr lang="en-US" sz="1800" b="0" dirty="0">
                 <a:solidFill>
                   <a:srgbClr val="2E4436"/>
                 </a:solidFill>
-                <a:latin typeface="Libre Caslon Display" pitchFamily="34" charset="0"/>
-                <a:ea typeface="Libre Caslon Display" pitchFamily="34" charset="-122"/>
-                <a:cs typeface="Libre Caslon Display" pitchFamily="34" charset="-120"/>
+                <a:latin typeface="Georgia" pitchFamily="34" charset="0"/>
+                <a:ea typeface="Georgia" pitchFamily="34" charset="-122"/>
+                <a:cs typeface="Georgia" pitchFamily="34" charset="-120"/>
               </a:rPr>
               <a:t>Most reduced screen time</a:t>
             </a:r>
@@ -8593,9 +8593,9 @@
                 <a:solidFill>
                   <a:srgbClr val="5C6552"/>
                 </a:solidFill>
-                <a:latin typeface="Karla" pitchFamily="34" charset="0"/>
-                <a:ea typeface="Karla" pitchFamily="34" charset="-122"/>
-                <a:cs typeface="Karla" pitchFamily="34" charset="-120"/>
+                <a:latin typeface="Calibri" pitchFamily="34" charset="0"/>
+                <a:ea typeface="Calibri" pitchFamily="34" charset="-122"/>
+                <a:cs typeface="Calibri" pitchFamily="34" charset="-120"/>
               </a:rPr>
               <a:t>The steepest downward trend from week one to the end of term.</a:t>
             </a:r>
@@ -8632,9 +8632,9 @@
                 <a:solidFill>
                   <a:srgbClr val="C28F38"/>
                 </a:solidFill>
-                <a:latin typeface="Karla" pitchFamily="34" charset="0"/>
-                <a:ea typeface="Karla" pitchFamily="34" charset="-122"/>
-                <a:cs typeface="Karla" pitchFamily="34" charset="-120"/>
+                <a:latin typeface="Calibri" pitchFamily="34" charset="0"/>
+                <a:ea typeface="Calibri" pitchFamily="34" charset="-122"/>
+                <a:cs typeface="Calibri" pitchFamily="34" charset="-120"/>
               </a:rPr>
               <a:t>Ask your teacher to open the Screen Time Tracker now to reveal the names.</a:t>
             </a:r>
@@ -8727,9 +8727,9 @@
                 <a:solidFill>
                   <a:srgbClr val="8B9179"/>
                 </a:solidFill>
-                <a:latin typeface="Karla" pitchFamily="34" charset="0"/>
-                <a:ea typeface="Karla" pitchFamily="34" charset="-122"/>
-                <a:cs typeface="Karla" pitchFamily="34" charset="-120"/>
+                <a:latin typeface="Calibri" pitchFamily="34" charset="0"/>
+                <a:ea typeface="Calibri" pitchFamily="34" charset="-122"/>
+                <a:cs typeface="Calibri" pitchFamily="34" charset="-120"/>
               </a:rPr>
               <a:t>THE PASTORAL GUIDE</a:t>
             </a:r>
@@ -8766,9 +8766,9 @@
                 <a:solidFill>
                   <a:srgbClr val="C28F38"/>
                 </a:solidFill>
-                <a:latin typeface="Karla" pitchFamily="34" charset="0"/>
-                <a:ea typeface="Karla" pitchFamily="34" charset="-122"/>
-                <a:cs typeface="Karla" pitchFamily="34" charset="-120"/>
+                <a:latin typeface="Calibri" pitchFamily="34" charset="0"/>
+                <a:ea typeface="Calibri" pitchFamily="34" charset="-122"/>
+                <a:cs typeface="Calibri" pitchFamily="34" charset="-120"/>
               </a:rPr>
               <a:t>SESSION 1</a:t>
             </a:r>
@@ -8801,13 +8801,13 @@
               <a:buNone/>
             </a:pPr>
             <a:r>
-              <a:rPr lang="en-US" sz="3400" b="1" dirty="0">
+              <a:rPr lang="en-US" sz="3400" b="0" dirty="0">
                 <a:solidFill>
                   <a:srgbClr val="2E4436"/>
                 </a:solidFill>
-                <a:latin typeface="Libre Caslon Display" pitchFamily="34" charset="0"/>
-                <a:ea typeface="Libre Caslon Display" pitchFamily="34" charset="-122"/>
-                <a:cs typeface="Libre Caslon Display" pitchFamily="34" charset="-120"/>
+                <a:latin typeface="Georgia" pitchFamily="34" charset="0"/>
+                <a:ea typeface="Georgia" pitchFamily="34" charset="-122"/>
+                <a:cs typeface="Georgia" pitchFamily="34" charset="-120"/>
               </a:rPr>
               <a:t>What we’ll cover today</a:t>
             </a:r>
@@ -8892,9 +8892,9 @@
                 <a:solidFill>
                   <a:srgbClr val="2E4436"/>
                 </a:solidFill>
-                <a:latin typeface="Karla" pitchFamily="34" charset="0"/>
-                <a:ea typeface="Karla" pitchFamily="34" charset="-122"/>
-                <a:cs typeface="Karla" pitchFamily="34" charset="-120"/>
+                <a:latin typeface="Calibri" pitchFamily="34" charset="0"/>
+                <a:ea typeface="Calibri" pitchFamily="34" charset="-122"/>
+                <a:cs typeface="Calibri" pitchFamily="34" charset="-120"/>
               </a:rPr>
               <a:t>The research</a:t>
             </a:r>
@@ -8931,9 +8931,9 @@
                 <a:solidFill>
                   <a:srgbClr val="5C6552"/>
                 </a:solidFill>
-                <a:latin typeface="Karla" pitchFamily="34" charset="0"/>
-                <a:ea typeface="Karla" pitchFamily="34" charset="-122"/>
-                <a:cs typeface="Karla" pitchFamily="34" charset="-120"/>
+                <a:latin typeface="Calibri" pitchFamily="34" charset="0"/>
+                <a:ea typeface="Calibri" pitchFamily="34" charset="-122"/>
+                <a:cs typeface="Calibri" pitchFamily="34" charset="-120"/>
               </a:rPr>
               <a:t>What screen time is linked to, in the brain, in sleep, and in concentration, with published studies, properly cited.</a:t>
             </a:r>
@@ -9018,9 +9018,9 @@
                 <a:solidFill>
                   <a:srgbClr val="2E4436"/>
                 </a:solidFill>
-                <a:latin typeface="Karla" pitchFamily="34" charset="0"/>
-                <a:ea typeface="Karla" pitchFamily="34" charset="-122"/>
-                <a:cs typeface="Karla" pitchFamily="34" charset="-120"/>
+                <a:latin typeface="Calibri" pitchFamily="34" charset="0"/>
+                <a:ea typeface="Calibri" pitchFamily="34" charset="-122"/>
+                <a:cs typeface="Calibri" pitchFamily="34" charset="-120"/>
               </a:rPr>
               <a:t>Your own habits</a:t>
             </a:r>
@@ -9057,9 +9057,9 @@
                 <a:solidFill>
                   <a:srgbClr val="5C6552"/>
                 </a:solidFill>
-                <a:latin typeface="Karla" pitchFamily="34" charset="0"/>
-                <a:ea typeface="Karla" pitchFamily="34" charset="-122"/>
-                <a:cs typeface="Karla" pitchFamily="34" charset="-120"/>
+                <a:latin typeface="Calibri" pitchFamily="34" charset="0"/>
+                <a:ea typeface="Calibri" pitchFamily="34" charset="-122"/>
+                <a:cs typeface="Calibri" pitchFamily="34" charset="-120"/>
               </a:rPr>
               <a:t>A short, honest reflection on your current screen time. No judgement, just a starting point.</a:t>
             </a:r>
@@ -9144,9 +9144,9 @@
                 <a:solidFill>
                   <a:srgbClr val="2E4436"/>
                 </a:solidFill>
-                <a:latin typeface="Karla" pitchFamily="34" charset="0"/>
-                <a:ea typeface="Karla" pitchFamily="34" charset="-122"/>
-                <a:cs typeface="Karla" pitchFamily="34" charset="-120"/>
+                <a:latin typeface="Calibri" pitchFamily="34" charset="0"/>
+                <a:ea typeface="Calibri" pitchFamily="34" charset="-122"/>
+                <a:cs typeface="Calibri" pitchFamily="34" charset="-120"/>
               </a:rPr>
               <a:t>The tracker</a:t>
             </a:r>
@@ -9183,9 +9183,9 @@
                 <a:solidFill>
                   <a:srgbClr val="5C6552"/>
                 </a:solidFill>
-                <a:latin typeface="Karla" pitchFamily="34" charset="0"/>
-                <a:ea typeface="Karla" pitchFamily="34" charset="-122"/>
-                <a:cs typeface="Karla" pitchFamily="34" charset="-120"/>
+                <a:latin typeface="Calibri" pitchFamily="34" charset="0"/>
+                <a:ea typeface="Calibri" pitchFamily="34" charset="-122"/>
+                <a:cs typeface="Calibri" pitchFamily="34" charset="-120"/>
               </a:rPr>
               <a:t>How the term-long Screen Time Tracker works, and the two awards up for grabs.</a:t>
             </a:r>
@@ -9270,9 +9270,9 @@
                 <a:solidFill>
                   <a:srgbClr val="2E4436"/>
                 </a:solidFill>
-                <a:latin typeface="Karla" pitchFamily="34" charset="0"/>
-                <a:ea typeface="Karla" pitchFamily="34" charset="-122"/>
-                <a:cs typeface="Karla" pitchFamily="34" charset="-120"/>
+                <a:latin typeface="Calibri" pitchFamily="34" charset="0"/>
+                <a:ea typeface="Calibri" pitchFamily="34" charset="-122"/>
+                <a:cs typeface="Calibri" pitchFamily="34" charset="-120"/>
               </a:rPr>
               <a:t>Your plan</a:t>
             </a:r>
@@ -9309,9 +9309,9 @@
                 <a:solidFill>
                   <a:srgbClr val="5C6552"/>
                 </a:solidFill>
-                <a:latin typeface="Karla" pitchFamily="34" charset="0"/>
-                <a:ea typeface="Karla" pitchFamily="34" charset="-122"/>
-                <a:cs typeface="Karla" pitchFamily="34" charset="-120"/>
+                <a:latin typeface="Calibri" pitchFamily="34" charset="0"/>
+                <a:ea typeface="Calibri" pitchFamily="34" charset="-122"/>
+                <a:cs typeface="Calibri" pitchFamily="34" charset="-120"/>
               </a:rPr>
               <a:t>A personal screen time reduction plan you’ll check back on at the halfway point, and again at the end of term.</a:t>
             </a:r>
@@ -9428,9 +9428,9 @@
                 <a:solidFill>
                   <a:srgbClr val="8B9179"/>
                 </a:solidFill>
-                <a:latin typeface="Karla" pitchFamily="34" charset="0"/>
-                <a:ea typeface="Karla" pitchFamily="34" charset="-122"/>
-                <a:cs typeface="Karla" pitchFamily="34" charset="-120"/>
+                <a:latin typeface="Calibri" pitchFamily="34" charset="0"/>
+                <a:ea typeface="Calibri" pitchFamily="34" charset="-122"/>
+                <a:cs typeface="Calibri" pitchFamily="34" charset="-120"/>
               </a:rPr>
               <a:t>THE PASTORAL GUIDE</a:t>
             </a:r>
@@ -9467,9 +9467,9 @@
                 <a:solidFill>
                   <a:srgbClr val="2E4436"/>
                 </a:solidFill>
-                <a:latin typeface="Libre Caslon Display" pitchFamily="34" charset="0"/>
-                <a:ea typeface="Libre Caslon Display" pitchFamily="34" charset="-122"/>
-                <a:cs typeface="Libre Caslon Display" pitchFamily="34" charset="-120"/>
+                <a:latin typeface="Georgia" pitchFamily="34" charset="0"/>
+                <a:ea typeface="Georgia" pitchFamily="34" charset="-122"/>
+                <a:cs typeface="Georgia" pitchFamily="34" charset="-120"/>
               </a:rPr>
               <a:t>Small changes, kept up, are worth more than big ones you can’t sustain.</a:t>
             </a:r>
@@ -9506,9 +9506,9 @@
                 <a:solidFill>
                   <a:srgbClr val="C28F38"/>
                 </a:solidFill>
-                <a:latin typeface="Karla" pitchFamily="34" charset="0"/>
-                <a:ea typeface="Karla" pitchFamily="34" charset="-122"/>
-                <a:cs typeface="Karla" pitchFamily="34" charset="-120"/>
+                <a:latin typeface="Calibri" pitchFamily="34" charset="0"/>
+                <a:ea typeface="Calibri" pitchFamily="34" charset="-122"/>
+                <a:cs typeface="Calibri" pitchFamily="34" charset="-120"/>
               </a:rPr>
               <a:t>Well done for being honest about your habits all term. That’s the hardest part.</a:t>
             </a:r>
@@ -9601,9 +9601,9 @@
                 <a:solidFill>
                   <a:srgbClr val="8B9179"/>
                 </a:solidFill>
-                <a:latin typeface="Karla" pitchFamily="34" charset="0"/>
-                <a:ea typeface="Karla" pitchFamily="34" charset="-122"/>
-                <a:cs typeface="Karla" pitchFamily="34" charset="-120"/>
+                <a:latin typeface="Calibri" pitchFamily="34" charset="0"/>
+                <a:ea typeface="Calibri" pitchFamily="34" charset="-122"/>
+                <a:cs typeface="Calibri" pitchFamily="34" charset="-120"/>
               </a:rPr>
               <a:t>THE PASTORAL GUIDE</a:t>
             </a:r>
@@ -9640,9 +9640,9 @@
                 <a:solidFill>
                   <a:srgbClr val="C28F38"/>
                 </a:solidFill>
-                <a:latin typeface="Karla" pitchFamily="34" charset="0"/>
-                <a:ea typeface="Karla" pitchFamily="34" charset="-122"/>
-                <a:cs typeface="Karla" pitchFamily="34" charset="-120"/>
+                <a:latin typeface="Calibri" pitchFamily="34" charset="0"/>
+                <a:ea typeface="Calibri" pitchFamily="34" charset="-122"/>
+                <a:cs typeface="Calibri" pitchFamily="34" charset="-120"/>
               </a:rPr>
               <a:t>FOR THE TEACHER</a:t>
             </a:r>
@@ -9675,13 +9675,13 @@
               <a:buNone/>
             </a:pPr>
             <a:r>
-              <a:rPr lang="en-US" sz="3000" b="1" dirty="0">
+              <a:rPr lang="en-US" sz="3000" b="0" dirty="0">
                 <a:solidFill>
                   <a:srgbClr val="2E4436"/>
                 </a:solidFill>
-                <a:latin typeface="Libre Caslon Display" pitchFamily="34" charset="0"/>
-                <a:ea typeface="Libre Caslon Display" pitchFamily="34" charset="-122"/>
-                <a:cs typeface="Libre Caslon Display" pitchFamily="34" charset="-120"/>
+                <a:latin typeface="Georgia" pitchFamily="34" charset="0"/>
+                <a:ea typeface="Georgia" pitchFamily="34" charset="-122"/>
+                <a:cs typeface="Georgia" pitchFamily="34" charset="-120"/>
               </a:rPr>
               <a:t>References</a:t>
             </a:r>
@@ -9722,9 +9722,9 @@
                 <a:solidFill>
                   <a:srgbClr val="5C6552"/>
                 </a:solidFill>
-                <a:latin typeface="Karla" pitchFamily="34" charset="0"/>
-                <a:ea typeface="Karla" pitchFamily="34" charset="-122"/>
-                <a:cs typeface="Karla" pitchFamily="34" charset="-120"/>
+                <a:latin typeface="Calibri" pitchFamily="34" charset="0"/>
+                <a:ea typeface="Calibri" pitchFamily="34" charset="-122"/>
+                <a:cs typeface="Calibri" pitchFamily="34" charset="-120"/>
               </a:rPr>
               <a:t>Hökby, S., Alvarsson, J., Westerlund, J., Carli, V., &amp; Hadlaczky, G. (2025). Adolescents’ screen time displaces multiple sleep pathways and elevates depressive symptoms over twelve months. PLOS Global Public Health.</a:t>
             </a:r>
@@ -9743,9 +9743,9 @@
                 <a:solidFill>
                   <a:srgbClr val="5C6552"/>
                 </a:solidFill>
-                <a:latin typeface="Karla" pitchFamily="34" charset="0"/>
-                <a:ea typeface="Karla" pitchFamily="34" charset="-122"/>
-                <a:cs typeface="Karla" pitchFamily="34" charset="-120"/>
+                <a:latin typeface="Calibri" pitchFamily="34" charset="0"/>
+                <a:ea typeface="Calibri" pitchFamily="34" charset="-122"/>
+                <a:cs typeface="Calibri" pitchFamily="34" charset="-120"/>
               </a:rPr>
               <a:t>Feng, X., Ren, S., &amp; Shi, P. (2025). The relationship and mechanism of screen time and academic performance among adolescents: an empirical study based on CEPS. Frontiers in Public Health, 13, 1533327.</a:t>
             </a:r>
@@ -9764,9 +9764,9 @@
                 <a:solidFill>
                   <a:srgbClr val="5C6552"/>
                 </a:solidFill>
-                <a:latin typeface="Karla" pitchFamily="34" charset="0"/>
-                <a:ea typeface="Karla" pitchFamily="34" charset="-122"/>
-                <a:cs typeface="Karla" pitchFamily="34" charset="-120"/>
+                <a:latin typeface="Calibri" pitchFamily="34" charset="0"/>
+                <a:ea typeface="Calibri" pitchFamily="34" charset="-122"/>
+                <a:cs typeface="Calibri" pitchFamily="34" charset="-120"/>
               </a:rPr>
               <a:t>Shou, Q., Yamashita, M., &amp; Mizuno, Y. (2025). Association of screen time with attention-deficit/hyperactivity disorder symptoms and their development: the mediating role of brain structure. Translational Psychiatry, 15, 447.</a:t>
             </a:r>
@@ -9785,9 +9785,9 @@
                 <a:solidFill>
                   <a:srgbClr val="5C6552"/>
                 </a:solidFill>
-                <a:latin typeface="Karla" pitchFamily="34" charset="0"/>
-                <a:ea typeface="Karla" pitchFamily="34" charset="-122"/>
-                <a:cs typeface="Karla" pitchFamily="34" charset="-120"/>
+                <a:latin typeface="Calibri" pitchFamily="34" charset="0"/>
+                <a:ea typeface="Calibri" pitchFamily="34" charset="-122"/>
+                <a:cs typeface="Calibri" pitchFamily="34" charset="-120"/>
               </a:rPr>
               <a:t>Wallace, J., Boers, E., Ouellet, J., Afzali, M. H., &amp; Conrod, P. (2023). Screen time, impulsivity, neuropsychological functions and their relationship to growth in adolescent attention-deficit/hyperactivity disorder symptoms. Scientific Reports, 13, 18108.</a:t>
             </a:r>
@@ -9880,9 +9880,9 @@
                 <a:solidFill>
                   <a:srgbClr val="8B9179"/>
                 </a:solidFill>
-                <a:latin typeface="Karla" pitchFamily="34" charset="0"/>
-                <a:ea typeface="Karla" pitchFamily="34" charset="-122"/>
-                <a:cs typeface="Karla" pitchFamily="34" charset="-120"/>
+                <a:latin typeface="Calibri" pitchFamily="34" charset="0"/>
+                <a:ea typeface="Calibri" pitchFamily="34" charset="-122"/>
+                <a:cs typeface="Calibri" pitchFamily="34" charset="-120"/>
               </a:rPr>
               <a:t>THE PASTORAL GUIDE</a:t>
             </a:r>
@@ -9919,9 +9919,9 @@
                 <a:solidFill>
                   <a:srgbClr val="C28F38"/>
                 </a:solidFill>
-                <a:latin typeface="Karla" pitchFamily="34" charset="0"/>
-                <a:ea typeface="Karla" pitchFamily="34" charset="-122"/>
-                <a:cs typeface="Karla" pitchFamily="34" charset="-120"/>
+                <a:latin typeface="Calibri" pitchFamily="34" charset="0"/>
+                <a:ea typeface="Calibri" pitchFamily="34" charset="-122"/>
+                <a:cs typeface="Calibri" pitchFamily="34" charset="-120"/>
               </a:rPr>
               <a:t>BEFORE WE START</a:t>
             </a:r>
@@ -9958,9 +9958,9 @@
                 <a:solidFill>
                   <a:srgbClr val="2E4436"/>
                 </a:solidFill>
-                <a:latin typeface="Libre Caslon Display" pitchFamily="34" charset="0"/>
-                <a:ea typeface="Libre Caslon Display" pitchFamily="34" charset="-122"/>
-                <a:cs typeface="Libre Caslon Display" pitchFamily="34" charset="-120"/>
+                <a:latin typeface="Georgia" pitchFamily="34" charset="0"/>
+                <a:ea typeface="Georgia" pitchFamily="34" charset="-122"/>
+                <a:cs typeface="Georgia" pitchFamily="34" charset="-120"/>
               </a:rPr>
               <a:t>How much of the day is that, really?</a:t>
             </a:r>
@@ -9993,13 +9993,13 @@
               <a:buNone/>
             </a:pPr>
             <a:r>
-              <a:rPr lang="en-US" sz="10800" b="1" dirty="0">
+              <a:rPr lang="en-US" sz="10800" b="0" dirty="0">
                 <a:solidFill>
                   <a:srgbClr val="C28F38"/>
                 </a:solidFill>
-                <a:latin typeface="Libre Caslon Display" pitchFamily="34" charset="0"/>
-                <a:ea typeface="Libre Caslon Display" pitchFamily="34" charset="-122"/>
-                <a:cs typeface="Libre Caslon Display" pitchFamily="34" charset="-120"/>
+                <a:latin typeface="Georgia" pitchFamily="34" charset="0"/>
+                <a:ea typeface="Georgia" pitchFamily="34" charset="-122"/>
+                <a:cs typeface="Georgia" pitchFamily="34" charset="-120"/>
               </a:rPr>
               <a:t>3–4 hrs</a:t>
             </a:r>
@@ -10036,9 +10036,9 @@
                 <a:solidFill>
                   <a:srgbClr val="5C6552"/>
                 </a:solidFill>
-                <a:latin typeface="Karla" pitchFamily="34" charset="0"/>
-                <a:ea typeface="Karla" pitchFamily="34" charset="-122"/>
-                <a:cs typeface="Karla" pitchFamily="34" charset="-120"/>
+                <a:latin typeface="Calibri" pitchFamily="34" charset="0"/>
+                <a:ea typeface="Calibri" pitchFamily="34" charset="-122"/>
+                <a:cs typeface="Calibri" pitchFamily="34" charset="-120"/>
               </a:rPr>
               <a:t>the average teenager’s daily leisure screen time in a recent study of over 4,800 students, about an hour more than recommended.</a:t>
             </a:r>
@@ -10075,9 +10075,9 @@
                 <a:solidFill>
                   <a:srgbClr val="8B9179"/>
                 </a:solidFill>
-                <a:latin typeface="Karla" pitchFamily="34" charset="0"/>
-                <a:ea typeface="Karla" pitchFamily="34" charset="-122"/>
-                <a:cs typeface="Karla" pitchFamily="34" charset="-120"/>
+                <a:latin typeface="Calibri" pitchFamily="34" charset="0"/>
+                <a:ea typeface="Calibri" pitchFamily="34" charset="-122"/>
+                <a:cs typeface="Calibri" pitchFamily="34" charset="-120"/>
               </a:rPr>
               <a:t>Hökby et al., 2025, PLOS Global Public Health</a:t>
             </a:r>
@@ -10170,9 +10170,9 @@
                 <a:solidFill>
                   <a:srgbClr val="8B9179"/>
                 </a:solidFill>
-                <a:latin typeface="Karla" pitchFamily="34" charset="0"/>
-                <a:ea typeface="Karla" pitchFamily="34" charset="-122"/>
-                <a:cs typeface="Karla" pitchFamily="34" charset="-120"/>
+                <a:latin typeface="Calibri" pitchFamily="34" charset="0"/>
+                <a:ea typeface="Calibri" pitchFamily="34" charset="-122"/>
+                <a:cs typeface="Calibri" pitchFamily="34" charset="-120"/>
               </a:rPr>
               <a:t>THE PASTORAL GUIDE</a:t>
             </a:r>
@@ -10257,9 +10257,9 @@
                 <a:solidFill>
                   <a:srgbClr val="C28F38"/>
                 </a:solidFill>
-                <a:latin typeface="Karla" pitchFamily="34" charset="0"/>
-                <a:ea typeface="Karla" pitchFamily="34" charset="-122"/>
-                <a:cs typeface="Karla" pitchFamily="34" charset="-120"/>
+                <a:latin typeface="Calibri" pitchFamily="34" charset="0"/>
+                <a:ea typeface="Calibri" pitchFamily="34" charset="-122"/>
+                <a:cs typeface="Calibri" pitchFamily="34" charset="-120"/>
               </a:rPr>
               <a:t>THE RESEARCH · BRAIN DEVELOPMENT</a:t>
             </a:r>
@@ -10292,13 +10292,13 @@
               <a:buNone/>
             </a:pPr>
             <a:r>
-              <a:rPr lang="en-US" sz="3000" b="1" dirty="0">
+              <a:rPr lang="en-US" sz="3000" b="0" dirty="0">
                 <a:solidFill>
                   <a:srgbClr val="2E4436"/>
                 </a:solidFill>
-                <a:latin typeface="Libre Caslon Display" pitchFamily="34" charset="0"/>
-                <a:ea typeface="Libre Caslon Display" pitchFamily="34" charset="-122"/>
-                <a:cs typeface="Libre Caslon Display" pitchFamily="34" charset="-120"/>
+                <a:latin typeface="Georgia" pitchFamily="34" charset="0"/>
+                <a:ea typeface="Georgia" pitchFamily="34" charset="-122"/>
+                <a:cs typeface="Georgia" pitchFamily="34" charset="-120"/>
               </a:rPr>
               <a:t>Screen time and the brain</a:t>
             </a:r>
@@ -10335,9 +10335,9 @@
                 <a:solidFill>
                   <a:srgbClr val="8B9179"/>
                 </a:solidFill>
-                <a:latin typeface="Karla" pitchFamily="34" charset="0"/>
-                <a:ea typeface="Karla" pitchFamily="34" charset="-122"/>
-                <a:cs typeface="Karla" pitchFamily="34" charset="-120"/>
+                <a:latin typeface="Calibri" pitchFamily="34" charset="0"/>
+                <a:ea typeface="Calibri" pitchFamily="34" charset="-122"/>
+                <a:cs typeface="Calibri" pitchFamily="34" charset="-120"/>
               </a:rPr>
               <a:t>10,116 children aged 9–10, followed for two years (ABCD study, USA)</a:t>
             </a:r>
@@ -10378,9 +10378,9 @@
                 <a:solidFill>
                   <a:srgbClr val="5C6552"/>
                 </a:solidFill>
-                <a:latin typeface="Karla" pitchFamily="34" charset="0"/>
-                <a:ea typeface="Karla" pitchFamily="34" charset="-122"/>
-                <a:cs typeface="Karla" pitchFamily="34" charset="-120"/>
+                <a:latin typeface="Calibri" pitchFamily="34" charset="0"/>
+                <a:ea typeface="Calibri" pitchFamily="34" charset="-122"/>
+                <a:cs typeface="Calibri" pitchFamily="34" charset="-120"/>
               </a:rPr>
               <a:t>More screen time was linked to more attention and impulse-control difficulties, both straight away and two years later.</a:t>
             </a:r>
@@ -10399,9 +10399,9 @@
                 <a:solidFill>
                   <a:srgbClr val="5C6552"/>
                 </a:solidFill>
-                <a:latin typeface="Karla" pitchFamily="34" charset="0"/>
-                <a:ea typeface="Karla" pitchFamily="34" charset="-122"/>
-                <a:cs typeface="Karla" pitchFamily="34" charset="-120"/>
+                <a:latin typeface="Calibri" pitchFamily="34" charset="0"/>
+                <a:ea typeface="Calibri" pitchFamily="34" charset="-122"/>
+                <a:cs typeface="Calibri" pitchFamily="34" charset="-120"/>
               </a:rPr>
               <a:t>It was also linked to smaller volume and thinner tissue in brain regions involved in planning, self-control and attention.</a:t>
             </a:r>
@@ -10420,9 +10420,9 @@
                 <a:solidFill>
                   <a:srgbClr val="5C6552"/>
                 </a:solidFill>
-                <a:latin typeface="Karla" pitchFamily="34" charset="0"/>
-                <a:ea typeface="Karla" pitchFamily="34" charset="-122"/>
-                <a:cs typeface="Karla" pitchFamily="34" charset="-120"/>
+                <a:latin typeface="Calibri" pitchFamily="34" charset="0"/>
+                <a:ea typeface="Calibri" pitchFamily="34" charset="-122"/>
+                <a:cs typeface="Calibri" pitchFamily="34" charset="-120"/>
               </a:rPr>
               <a:t>Those brain changes helped explain part of why more screen time meant more attention difficulties.</a:t>
             </a:r>
@@ -10485,9 +10485,9 @@
                 <a:solidFill>
                   <a:srgbClr val="C28F38"/>
                 </a:solidFill>
-                <a:latin typeface="Karla" pitchFamily="34" charset="0"/>
-                <a:ea typeface="Karla" pitchFamily="34" charset="-122"/>
-                <a:cs typeface="Karla" pitchFamily="34" charset="-120"/>
+                <a:latin typeface="Calibri" pitchFamily="34" charset="0"/>
+                <a:ea typeface="Calibri" pitchFamily="34" charset="-122"/>
+                <a:cs typeface="Calibri" pitchFamily="34" charset="-120"/>
               </a:rPr>
               <a:t>Screen time doesn’t just distract you in the moment. Over two years, more of it was linked to measurable changes in the parts of the brain that help you focus.</a:t>
             </a:r>
@@ -10524,9 +10524,9 @@
                 <a:solidFill>
                   <a:srgbClr val="8B9179"/>
                 </a:solidFill>
-                <a:latin typeface="Karla" pitchFamily="34" charset="0"/>
-                <a:ea typeface="Karla" pitchFamily="34" charset="-122"/>
-                <a:cs typeface="Karla" pitchFamily="34" charset="-120"/>
+                <a:latin typeface="Calibri" pitchFamily="34" charset="0"/>
+                <a:ea typeface="Calibri" pitchFamily="34" charset="-122"/>
+                <a:cs typeface="Calibri" pitchFamily="34" charset="-120"/>
               </a:rPr>
               <a:t>Shou, Yamashita &amp; Mizuno, 2025, Translational Psychiatry</a:t>
             </a:r>
@@ -10619,9 +10619,9 @@
                 <a:solidFill>
                   <a:srgbClr val="8B9179"/>
                 </a:solidFill>
-                <a:latin typeface="Karla" pitchFamily="34" charset="0"/>
-                <a:ea typeface="Karla" pitchFamily="34" charset="-122"/>
-                <a:cs typeface="Karla" pitchFamily="34" charset="-120"/>
+                <a:latin typeface="Calibri" pitchFamily="34" charset="0"/>
+                <a:ea typeface="Calibri" pitchFamily="34" charset="-122"/>
+                <a:cs typeface="Calibri" pitchFamily="34" charset="-120"/>
               </a:rPr>
               <a:t>THE PASTORAL GUIDE</a:t>
             </a:r>
@@ -10706,9 +10706,9 @@
                 <a:solidFill>
                   <a:srgbClr val="C28F38"/>
                 </a:solidFill>
-                <a:latin typeface="Karla" pitchFamily="34" charset="0"/>
-                <a:ea typeface="Karla" pitchFamily="34" charset="-122"/>
-                <a:cs typeface="Karla" pitchFamily="34" charset="-120"/>
+                <a:latin typeface="Calibri" pitchFamily="34" charset="0"/>
+                <a:ea typeface="Calibri" pitchFamily="34" charset="-122"/>
+                <a:cs typeface="Calibri" pitchFamily="34" charset="-120"/>
               </a:rPr>
               <a:t>THE RESEARCH · SELF-CONTROL</a:t>
             </a:r>
@@ -10741,13 +10741,13 @@
               <a:buNone/>
             </a:pPr>
             <a:r>
-              <a:rPr lang="en-US" sz="3000" b="1" dirty="0">
+              <a:rPr lang="en-US" sz="3000" b="0" dirty="0">
                 <a:solidFill>
                   <a:srgbClr val="2E4436"/>
                 </a:solidFill>
-                <a:latin typeface="Libre Caslon Display" pitchFamily="34" charset="0"/>
-                <a:ea typeface="Libre Caslon Display" pitchFamily="34" charset="-122"/>
-                <a:cs typeface="Libre Caslon Display" pitchFamily="34" charset="-120"/>
+                <a:latin typeface="Georgia" pitchFamily="34" charset="0"/>
+                <a:ea typeface="Georgia" pitchFamily="34" charset="-122"/>
+                <a:cs typeface="Georgia" pitchFamily="34" charset="-120"/>
               </a:rPr>
               <a:t>Screen time and impulsivity</a:t>
             </a:r>
@@ -10784,9 +10784,9 @@
                 <a:solidFill>
                   <a:srgbClr val="8B9179"/>
                 </a:solidFill>
-                <a:latin typeface="Karla" pitchFamily="34" charset="0"/>
-                <a:ea typeface="Karla" pitchFamily="34" charset="-122"/>
-                <a:cs typeface="Karla" pitchFamily="34" charset="-120"/>
+                <a:latin typeface="Calibri" pitchFamily="34" charset="0"/>
+                <a:ea typeface="Calibri" pitchFamily="34" charset="-122"/>
+                <a:cs typeface="Calibri" pitchFamily="34" charset="-120"/>
               </a:rPr>
               <a:t>~4,000 Canadian students, followed from Year 8 to Year 12 (5 years)</a:t>
             </a:r>
@@ -10827,9 +10827,9 @@
                 <a:solidFill>
                   <a:srgbClr val="5C6552"/>
                 </a:solidFill>
-                <a:latin typeface="Karla" pitchFamily="34" charset="0"/>
-                <a:ea typeface="Karla" pitchFamily="34" charset="-122"/>
-                <a:cs typeface="Karla" pitchFamily="34" charset="-120"/>
+                <a:latin typeface="Calibri" pitchFamily="34" charset="0"/>
+                <a:ea typeface="Calibri" pitchFamily="34" charset="-122"/>
+                <a:cs typeface="Calibri" pitchFamily="34" charset="-120"/>
               </a:rPr>
               <a:t>Social media, TV and gaming (but not general computer use) were linked to more attention and impulsivity symptoms over time.</a:t>
             </a:r>
@@ -10848,9 +10848,9 @@
                 <a:solidFill>
                   <a:srgbClr val="5C6552"/>
                 </a:solidFill>
-                <a:latin typeface="Karla" pitchFamily="34" charset="0"/>
-                <a:ea typeface="Karla" pitchFamily="34" charset="-122"/>
-                <a:cs typeface="Karla" pitchFamily="34" charset="-120"/>
+                <a:latin typeface="Calibri" pitchFamily="34" charset="0"/>
+                <a:ea typeface="Calibri" pitchFamily="34" charset="-122"/>
+                <a:cs typeface="Calibri" pitchFamily="34" charset="-120"/>
               </a:rPr>
               <a:t>Weaker impulse control was the strongest explanation for that link.</a:t>
             </a:r>
@@ -10869,9 +10869,9 @@
                 <a:solidFill>
                   <a:srgbClr val="5C6552"/>
                 </a:solidFill>
-                <a:latin typeface="Karla" pitchFamily="34" charset="0"/>
-                <a:ea typeface="Karla" pitchFamily="34" charset="-122"/>
-                <a:cs typeface="Karla" pitchFamily="34" charset="-120"/>
+                <a:latin typeface="Calibri" pitchFamily="34" charset="0"/>
+                <a:ea typeface="Calibri" pitchFamily="34" charset="-122"/>
+                <a:cs typeface="Calibri" pitchFamily="34" charset="-120"/>
               </a:rPr>
               <a:t>Heavier social media use specifically was linked to poorer impulse control roughly three years later.</a:t>
             </a:r>
@@ -10934,9 +10934,9 @@
                 <a:solidFill>
                   <a:srgbClr val="C28F38"/>
                 </a:solidFill>
-                <a:latin typeface="Karla" pitchFamily="34" charset="0"/>
-                <a:ea typeface="Karla" pitchFamily="34" charset="-122"/>
-                <a:cs typeface="Karla" pitchFamily="34" charset="-120"/>
+                <a:latin typeface="Calibri" pitchFamily="34" charset="0"/>
+                <a:ea typeface="Calibri" pitchFamily="34" charset="-122"/>
+                <a:cs typeface="Calibri" pitchFamily="34" charset="-120"/>
               </a:rPr>
               <a:t>It’s specifically social media, gaming and TV, not all screen use, that were linked to weaker impulse control years down the line.</a:t>
             </a:r>
@@ -10973,9 +10973,9 @@
                 <a:solidFill>
                   <a:srgbClr val="8B9179"/>
                 </a:solidFill>
-                <a:latin typeface="Karla" pitchFamily="34" charset="0"/>
-                <a:ea typeface="Karla" pitchFamily="34" charset="-122"/>
-                <a:cs typeface="Karla" pitchFamily="34" charset="-120"/>
+                <a:latin typeface="Calibri" pitchFamily="34" charset="0"/>
+                <a:ea typeface="Calibri" pitchFamily="34" charset="-122"/>
+                <a:cs typeface="Calibri" pitchFamily="34" charset="-120"/>
               </a:rPr>
               <a:t>Wallace, Boers, Ouellet, Afzali &amp; Conrod, 2023, Scientific Reports</a:t>
             </a:r>
@@ -11068,9 +11068,9 @@
                 <a:solidFill>
                   <a:srgbClr val="8B9179"/>
                 </a:solidFill>
-                <a:latin typeface="Karla" pitchFamily="34" charset="0"/>
-                <a:ea typeface="Karla" pitchFamily="34" charset="-122"/>
-                <a:cs typeface="Karla" pitchFamily="34" charset="-120"/>
+                <a:latin typeface="Calibri" pitchFamily="34" charset="0"/>
+                <a:ea typeface="Calibri" pitchFamily="34" charset="-122"/>
+                <a:cs typeface="Calibri" pitchFamily="34" charset="-120"/>
               </a:rPr>
               <a:t>THE PASTORAL GUIDE</a:t>
             </a:r>
@@ -11155,9 +11155,9 @@
                 <a:solidFill>
                   <a:srgbClr val="C28F38"/>
                 </a:solidFill>
-                <a:latin typeface="Karla" pitchFamily="34" charset="0"/>
-                <a:ea typeface="Karla" pitchFamily="34" charset="-122"/>
-                <a:cs typeface="Karla" pitchFamily="34" charset="-120"/>
+                <a:latin typeface="Calibri" pitchFamily="34" charset="0"/>
+                <a:ea typeface="Calibri" pitchFamily="34" charset="-122"/>
+                <a:cs typeface="Calibri" pitchFamily="34" charset="-120"/>
               </a:rPr>
               <a:t>THE RESEARCH · CONCENTRATION</a:t>
             </a:r>
@@ -11190,13 +11190,13 @@
               <a:buNone/>
             </a:pPr>
             <a:r>
-              <a:rPr lang="en-US" sz="3000" b="1" dirty="0">
+              <a:rPr lang="en-US" sz="3000" b="0" dirty="0">
                 <a:solidFill>
                   <a:srgbClr val="2E4436"/>
                 </a:solidFill>
-                <a:latin typeface="Libre Caslon Display" pitchFamily="34" charset="0"/>
-                <a:ea typeface="Libre Caslon Display" pitchFamily="34" charset="-122"/>
-                <a:cs typeface="Libre Caslon Display" pitchFamily="34" charset="-120"/>
+                <a:latin typeface="Georgia" pitchFamily="34" charset="0"/>
+                <a:ea typeface="Georgia" pitchFamily="34" charset="-122"/>
+                <a:cs typeface="Georgia" pitchFamily="34" charset="-120"/>
               </a:rPr>
               <a:t>Screen time and grades</a:t>
             </a:r>
@@ -11233,9 +11233,9 @@
                 <a:solidFill>
                   <a:srgbClr val="8B9179"/>
                 </a:solidFill>
-                <a:latin typeface="Karla" pitchFamily="34" charset="0"/>
-                <a:ea typeface="Karla" pitchFamily="34" charset="-122"/>
-                <a:cs typeface="Karla" pitchFamily="34" charset="-120"/>
+                <a:latin typeface="Calibri" pitchFamily="34" charset="0"/>
+                <a:ea typeface="Calibri" pitchFamily="34" charset="-122"/>
+                <a:cs typeface="Calibri" pitchFamily="34" charset="-120"/>
               </a:rPr>
               <a:t>17,150 students aged 13 to 15 (China Education Panel Survey)</a:t>
             </a:r>
@@ -11276,9 +11276,9 @@
                 <a:solidFill>
                   <a:srgbClr val="5C6552"/>
                 </a:solidFill>
-                <a:latin typeface="Karla" pitchFamily="34" charset="0"/>
-                <a:ea typeface="Karla" pitchFamily="34" charset="-122"/>
-                <a:cs typeface="Karla" pitchFamily="34" charset="-120"/>
+                <a:latin typeface="Calibri" pitchFamily="34" charset="0"/>
+                <a:ea typeface="Calibri" pitchFamily="34" charset="-122"/>
+                <a:cs typeface="Calibri" pitchFamily="34" charset="-120"/>
               </a:rPr>
               <a:t>More screen time was linked to lower grades overall, and in maths, English and Chinese in particular.</a:t>
             </a:r>
@@ -11297,9 +11297,9 @@
                 <a:solidFill>
                   <a:srgbClr val="5C6552"/>
                 </a:solidFill>
-                <a:latin typeface="Karla" pitchFamily="34" charset="0"/>
-                <a:ea typeface="Karla" pitchFamily="34" charset="-122"/>
-                <a:cs typeface="Karla" pitchFamily="34" charset="-120"/>
+                <a:latin typeface="Calibri" pitchFamily="34" charset="0"/>
+                <a:ea typeface="Calibri" pitchFamily="34" charset="-122"/>
+                <a:cs typeface="Calibri" pitchFamily="34" charset="-120"/>
               </a:rPr>
               <a:t>Internet use and gaming were linked to a bigger drop in grades than watching TV.</a:t>
             </a:r>
@@ -11318,9 +11318,9 @@
                 <a:solidFill>
                   <a:srgbClr val="5C6552"/>
                 </a:solidFill>
-                <a:latin typeface="Karla" pitchFamily="34" charset="0"/>
-                <a:ea typeface="Karla" pitchFamily="34" charset="-122"/>
-                <a:cs typeface="Karla" pitchFamily="34" charset="-120"/>
+                <a:latin typeface="Calibri" pitchFamily="34" charset="0"/>
+                <a:ea typeface="Calibri" pitchFamily="34" charset="-122"/>
+                <a:cs typeface="Calibri" pitchFamily="34" charset="-120"/>
               </a:rPr>
               <a:t>Concentration itself was the main reason for the link. Sleep and mood mattered too, but mattered less.</a:t>
             </a:r>
@@ -11383,9 +11383,9 @@
                 <a:solidFill>
                   <a:srgbClr val="C28F38"/>
                 </a:solidFill>
-                <a:latin typeface="Karla" pitchFamily="34" charset="0"/>
-                <a:ea typeface="Karla" pitchFamily="34" charset="-122"/>
-                <a:cs typeface="Karla" pitchFamily="34" charset="-120"/>
+                <a:latin typeface="Calibri" pitchFamily="34" charset="0"/>
+                <a:ea typeface="Calibri" pitchFamily="34" charset="-122"/>
+                <a:cs typeface="Calibri" pitchFamily="34" charset="-120"/>
               </a:rPr>
               <a:t>The type of screen use matters. Passive TV time and active gaming or scrolling don’t cost your concentration equally.</a:t>
             </a:r>
@@ -11422,9 +11422,9 @@
                 <a:solidFill>
                   <a:srgbClr val="8B9179"/>
                 </a:solidFill>
-                <a:latin typeface="Karla" pitchFamily="34" charset="0"/>
-                <a:ea typeface="Karla" pitchFamily="34" charset="-122"/>
-                <a:cs typeface="Karla" pitchFamily="34" charset="-120"/>
+                <a:latin typeface="Calibri" pitchFamily="34" charset="0"/>
+                <a:ea typeface="Calibri" pitchFamily="34" charset="-122"/>
+                <a:cs typeface="Calibri" pitchFamily="34" charset="-120"/>
               </a:rPr>
               <a:t>Feng, Ren &amp; Shi, 2025, Frontiers in Public Health</a:t>
             </a:r>
@@ -11517,9 +11517,9 @@
                 <a:solidFill>
                   <a:srgbClr val="8B9179"/>
                 </a:solidFill>
-                <a:latin typeface="Karla" pitchFamily="34" charset="0"/>
-                <a:ea typeface="Karla" pitchFamily="34" charset="-122"/>
-                <a:cs typeface="Karla" pitchFamily="34" charset="-120"/>
+                <a:latin typeface="Calibri" pitchFamily="34" charset="0"/>
+                <a:ea typeface="Calibri" pitchFamily="34" charset="-122"/>
+                <a:cs typeface="Calibri" pitchFamily="34" charset="-120"/>
               </a:rPr>
               <a:t>THE PASTORAL GUIDE</a:t>
             </a:r>
@@ -11604,9 +11604,9 @@
                 <a:solidFill>
                   <a:srgbClr val="C28F38"/>
                 </a:solidFill>
-                <a:latin typeface="Karla" pitchFamily="34" charset="0"/>
-                <a:ea typeface="Karla" pitchFamily="34" charset="-122"/>
-                <a:cs typeface="Karla" pitchFamily="34" charset="-120"/>
+                <a:latin typeface="Calibri" pitchFamily="34" charset="0"/>
+                <a:ea typeface="Calibri" pitchFamily="34" charset="-122"/>
+                <a:cs typeface="Calibri" pitchFamily="34" charset="-120"/>
               </a:rPr>
               <a:t>THE RESEARCH · SLEEP</a:t>
             </a:r>
@@ -11639,13 +11639,13 @@
               <a:buNone/>
             </a:pPr>
             <a:r>
-              <a:rPr lang="en-US" sz="3000" b="1" dirty="0">
+              <a:rPr lang="en-US" sz="3000" b="0" dirty="0">
                 <a:solidFill>
                   <a:srgbClr val="2E4436"/>
                 </a:solidFill>
-                <a:latin typeface="Libre Caslon Display" pitchFamily="34" charset="0"/>
-                <a:ea typeface="Libre Caslon Display" pitchFamily="34" charset="-122"/>
-                <a:cs typeface="Libre Caslon Display" pitchFamily="34" charset="-120"/>
+                <a:latin typeface="Georgia" pitchFamily="34" charset="0"/>
+                <a:ea typeface="Georgia" pitchFamily="34" charset="-122"/>
+                <a:cs typeface="Georgia" pitchFamily="34" charset="-120"/>
               </a:rPr>
               <a:t>Screen time and sleep</a:t>
             </a:r>
@@ -11682,9 +11682,9 @@
                 <a:solidFill>
                   <a:srgbClr val="8B9179"/>
                 </a:solidFill>
-                <a:latin typeface="Karla" pitchFamily="34" charset="0"/>
-                <a:ea typeface="Karla" pitchFamily="34" charset="-122"/>
-                <a:cs typeface="Karla" pitchFamily="34" charset="-120"/>
+                <a:latin typeface="Calibri" pitchFamily="34" charset="0"/>
+                <a:ea typeface="Calibri" pitchFamily="34" charset="-122"/>
+                <a:cs typeface="Calibri" pitchFamily="34" charset="-120"/>
               </a:rPr>
               <a:t>4,810 students aged 12–16, tracked over 12 months (Stockholm)</a:t>
             </a:r>
@@ -11725,9 +11725,9 @@
                 <a:solidFill>
                   <a:srgbClr val="5C6552"/>
                 </a:solidFill>
-                <a:latin typeface="Karla" pitchFamily="34" charset="0"/>
-                <a:ea typeface="Karla" pitchFamily="34" charset="-122"/>
-                <a:cs typeface="Karla" pitchFamily="34" charset="-120"/>
+                <a:latin typeface="Calibri" pitchFamily="34" charset="0"/>
+                <a:ea typeface="Calibri" pitchFamily="34" charset="-122"/>
+                <a:cs typeface="Calibri" pitchFamily="34" charset="-120"/>
               </a:rPr>
               <a:t>Heavier screen use measurably worsened sleep quality, sleep duration and sleep timing within just three months.</a:t>
             </a:r>
@@ -11746,9 +11746,9 @@
                 <a:solidFill>
                   <a:srgbClr val="5C6552"/>
                 </a:solidFill>
-                <a:latin typeface="Karla" pitchFamily="34" charset="0"/>
-                <a:ea typeface="Karla" pitchFamily="34" charset="-122"/>
-                <a:cs typeface="Karla" pitchFamily="34" charset="-120"/>
+                <a:latin typeface="Calibri" pitchFamily="34" charset="0"/>
+                <a:ea typeface="Calibri" pitchFamily="34" charset="-122"/>
+                <a:cs typeface="Calibri" pitchFamily="34" charset="-120"/>
               </a:rPr>
               <a:t>Among girls, poorer sleep explained 38–57% of the link between screen time and low mood.</a:t>
             </a:r>
@@ -11767,9 +11767,9 @@
                 <a:solidFill>
                   <a:srgbClr val="5C6552"/>
                 </a:solidFill>
-                <a:latin typeface="Karla" pitchFamily="34" charset="0"/>
-                <a:ea typeface="Karla" pitchFamily="34" charset="-122"/>
-                <a:cs typeface="Karla" pitchFamily="34" charset="-120"/>
+                <a:latin typeface="Calibri" pitchFamily="34" charset="0"/>
+                <a:ea typeface="Calibri" pitchFamily="34" charset="-122"/>
+                <a:cs typeface="Calibri" pitchFamily="34" charset="-120"/>
               </a:rPr>
               <a:t>The average student in the study was already going over the recommended screen time by around an hour a day.</a:t>
             </a:r>
@@ -11832,9 +11832,9 @@
                 <a:solidFill>
                   <a:srgbClr val="C28F38"/>
                 </a:solidFill>
-                <a:latin typeface="Karla" pitchFamily="34" charset="0"/>
-                <a:ea typeface="Karla" pitchFamily="34" charset="-122"/>
-                <a:cs typeface="Karla" pitchFamily="34" charset="-120"/>
+                <a:latin typeface="Calibri" pitchFamily="34" charset="0"/>
+                <a:ea typeface="Calibri" pitchFamily="34" charset="-122"/>
+                <a:cs typeface="Calibri" pitchFamily="34" charset="-120"/>
               </a:rPr>
               <a:t>Poor sleep is a big part of why heavy screen use is linked to low mood, and it can start shifting in a matter of weeks.</a:t>
             </a:r>
@@ -11871,9 +11871,9 @@
                 <a:solidFill>
                   <a:srgbClr val="8B9179"/>
                 </a:solidFill>
-                <a:latin typeface="Karla" pitchFamily="34" charset="0"/>
-                <a:ea typeface="Karla" pitchFamily="34" charset="-122"/>
-                <a:cs typeface="Karla" pitchFamily="34" charset="-120"/>
+                <a:latin typeface="Calibri" pitchFamily="34" charset="0"/>
+                <a:ea typeface="Calibri" pitchFamily="34" charset="-122"/>
+                <a:cs typeface="Calibri" pitchFamily="34" charset="-120"/>
               </a:rPr>
               <a:t>Hökby, Alvarsson, Westerlund, Carli &amp; Hadlaczky, 2025, PLOS Global Public Health</a:t>
             </a:r>
@@ -11966,9 +11966,9 @@
                 <a:solidFill>
                   <a:srgbClr val="8B9179"/>
                 </a:solidFill>
-                <a:latin typeface="Karla" pitchFamily="34" charset="0"/>
-                <a:ea typeface="Karla" pitchFamily="34" charset="-122"/>
-                <a:cs typeface="Karla" pitchFamily="34" charset="-120"/>
+                <a:latin typeface="Calibri" pitchFamily="34" charset="0"/>
+                <a:ea typeface="Calibri" pitchFamily="34" charset="-122"/>
+                <a:cs typeface="Calibri" pitchFamily="34" charset="-120"/>
               </a:rPr>
               <a:t>THE PASTORAL GUIDE</a:t>
             </a:r>
@@ -12005,9 +12005,9 @@
                 <a:solidFill>
                   <a:srgbClr val="C28F38"/>
                 </a:solidFill>
-                <a:latin typeface="Karla" pitchFamily="34" charset="0"/>
-                <a:ea typeface="Karla" pitchFamily="34" charset="-122"/>
-                <a:cs typeface="Karla" pitchFamily="34" charset="-120"/>
+                <a:latin typeface="Calibri" pitchFamily="34" charset="0"/>
+                <a:ea typeface="Calibri" pitchFamily="34" charset="-122"/>
+                <a:cs typeface="Calibri" pitchFamily="34" charset="-120"/>
               </a:rPr>
               <a:t>FOUR STUDIES, ONE PATTERN</a:t>
             </a:r>
@@ -12040,13 +12040,13 @@
               <a:buNone/>
             </a:pPr>
             <a:r>
-              <a:rPr lang="en-US" sz="3200" b="1" dirty="0">
+              <a:rPr lang="en-US" sz="3200" b="0" dirty="0">
                 <a:solidFill>
                   <a:srgbClr val="2E4436"/>
                 </a:solidFill>
-                <a:latin typeface="Libre Caslon Display" pitchFamily="34" charset="0"/>
-                <a:ea typeface="Libre Caslon Display" pitchFamily="34" charset="-122"/>
-                <a:cs typeface="Libre Caslon Display" pitchFamily="34" charset="-120"/>
+                <a:latin typeface="Georgia" pitchFamily="34" charset="0"/>
+                <a:ea typeface="Georgia" pitchFamily="34" charset="-122"/>
+                <a:cs typeface="Georgia" pitchFamily="34" charset="-120"/>
               </a:rPr>
               <a:t>Bringing it together</a:t>
             </a:r>
@@ -12157,9 +12157,9 @@
                 <a:solidFill>
                   <a:srgbClr val="2E4436"/>
                 </a:solidFill>
-                <a:latin typeface="Karla" pitchFamily="34" charset="0"/>
-                <a:ea typeface="Karla" pitchFamily="34" charset="-122"/>
-                <a:cs typeface="Karla" pitchFamily="34" charset="-120"/>
+                <a:latin typeface="Calibri" pitchFamily="34" charset="0"/>
+                <a:ea typeface="Calibri" pitchFamily="34" charset="-122"/>
+                <a:cs typeface="Calibri" pitchFamily="34" charset="-120"/>
               </a:rPr>
               <a:t>Brain</a:t>
             </a:r>
@@ -12196,9 +12196,9 @@
                 <a:solidFill>
                   <a:srgbClr val="5C6552"/>
                 </a:solidFill>
-                <a:latin typeface="Karla" pitchFamily="34" charset="0"/>
-                <a:ea typeface="Karla" pitchFamily="34" charset="-122"/>
-                <a:cs typeface="Karla" pitchFamily="34" charset="-120"/>
+                <a:latin typeface="Calibri" pitchFamily="34" charset="0"/>
+                <a:ea typeface="Calibri" pitchFamily="34" charset="-122"/>
+                <a:cs typeface="Calibri" pitchFamily="34" charset="-120"/>
               </a:rPr>
               <a:t>Linked to changes in the regions that support focus and self-control.</a:t>
             </a:r>
@@ -12309,9 +12309,9 @@
                 <a:solidFill>
                   <a:srgbClr val="2E4436"/>
                 </a:solidFill>
-                <a:latin typeface="Karla" pitchFamily="34" charset="0"/>
-                <a:ea typeface="Karla" pitchFamily="34" charset="-122"/>
-                <a:cs typeface="Karla" pitchFamily="34" charset="-120"/>
+                <a:latin typeface="Calibri" pitchFamily="34" charset="0"/>
+                <a:ea typeface="Calibri" pitchFamily="34" charset="-122"/>
+                <a:cs typeface="Calibri" pitchFamily="34" charset="-120"/>
               </a:rPr>
               <a:t>Self-control</a:t>
             </a:r>
@@ -12348,9 +12348,9 @@
                 <a:solidFill>
                   <a:srgbClr val="5C6552"/>
                 </a:solidFill>
-                <a:latin typeface="Karla" pitchFamily="34" charset="0"/>
-                <a:ea typeface="Karla" pitchFamily="34" charset="-122"/>
-                <a:cs typeface="Karla" pitchFamily="34" charset="-120"/>
+                <a:latin typeface="Calibri" pitchFamily="34" charset="0"/>
+                <a:ea typeface="Calibri" pitchFamily="34" charset="-122"/>
+                <a:cs typeface="Calibri" pitchFamily="34" charset="-120"/>
               </a:rPr>
               <a:t>Heavier social media use linked to weaker impulse control, years later.</a:t>
             </a:r>
@@ -12461,9 +12461,9 @@
                 <a:solidFill>
                   <a:srgbClr val="2E4436"/>
                 </a:solidFill>
-                <a:latin typeface="Karla" pitchFamily="34" charset="0"/>
-                <a:ea typeface="Karla" pitchFamily="34" charset="-122"/>
-                <a:cs typeface="Karla" pitchFamily="34" charset="-120"/>
+                <a:latin typeface="Calibri" pitchFamily="34" charset="0"/>
+                <a:ea typeface="Calibri" pitchFamily="34" charset="-122"/>
+                <a:cs typeface="Calibri" pitchFamily="34" charset="-120"/>
               </a:rPr>
               <a:t>Concentration</a:t>
             </a:r>
@@ -12500,9 +12500,9 @@
                 <a:solidFill>
                   <a:srgbClr val="5C6552"/>
                 </a:solidFill>
-                <a:latin typeface="Karla" pitchFamily="34" charset="0"/>
-                <a:ea typeface="Karla" pitchFamily="34" charset="-122"/>
-                <a:cs typeface="Karla" pitchFamily="34" charset="-120"/>
+                <a:latin typeface="Calibri" pitchFamily="34" charset="0"/>
+                <a:ea typeface="Calibri" pitchFamily="34" charset="-122"/>
+                <a:cs typeface="Calibri" pitchFamily="34" charset="-120"/>
               </a:rPr>
               <a:t>More screen time, lower grades. Gaming and scrolling most of all.</a:t>
             </a:r>
@@ -12613,9 +12613,9 @@
                 <a:solidFill>
                   <a:srgbClr val="2E4436"/>
                 </a:solidFill>
-                <a:latin typeface="Karla" pitchFamily="34" charset="0"/>
-                <a:ea typeface="Karla" pitchFamily="34" charset="-122"/>
-                <a:cs typeface="Karla" pitchFamily="34" charset="-120"/>
+                <a:latin typeface="Calibri" pitchFamily="34" charset="0"/>
+                <a:ea typeface="Calibri" pitchFamily="34" charset="-122"/>
+                <a:cs typeface="Calibri" pitchFamily="34" charset="-120"/>
               </a:rPr>
               <a:t>Sleep</a:t>
             </a:r>
@@ -12652,9 +12652,9 @@
                 <a:solidFill>
                   <a:srgbClr val="5C6552"/>
                 </a:solidFill>
-                <a:latin typeface="Karla" pitchFamily="34" charset="0"/>
-                <a:ea typeface="Karla" pitchFamily="34" charset="-122"/>
-                <a:cs typeface="Karla" pitchFamily="34" charset="-120"/>
+                <a:latin typeface="Calibri" pitchFamily="34" charset="0"/>
+                <a:ea typeface="Calibri" pitchFamily="34" charset="-122"/>
+                <a:cs typeface="Calibri" pitchFamily="34" charset="-120"/>
               </a:rPr>
               <a:t>Worsened sleep quality and duration within just three months.</a:t>
             </a:r>
@@ -12747,9 +12747,9 @@
                 <a:solidFill>
                   <a:srgbClr val="8B9179"/>
                 </a:solidFill>
-                <a:latin typeface="Karla" pitchFamily="34" charset="0"/>
-                <a:ea typeface="Karla" pitchFamily="34" charset="-122"/>
-                <a:cs typeface="Karla" pitchFamily="34" charset="-120"/>
+                <a:latin typeface="Calibri" pitchFamily="34" charset="0"/>
+                <a:ea typeface="Calibri" pitchFamily="34" charset="-122"/>
+                <a:cs typeface="Calibri" pitchFamily="34" charset="-120"/>
               </a:rPr>
               <a:t>THE PASTORAL GUIDE</a:t>
             </a:r>
@@ -12786,9 +12786,9 @@
                 <a:solidFill>
                   <a:srgbClr val="C28F38"/>
                 </a:solidFill>
-                <a:latin typeface="Karla" pitchFamily="34" charset="0"/>
-                <a:ea typeface="Karla" pitchFamily="34" charset="-122"/>
-                <a:cs typeface="Karla" pitchFamily="34" charset="-120"/>
+                <a:latin typeface="Calibri" pitchFamily="34" charset="0"/>
+                <a:ea typeface="Calibri" pitchFamily="34" charset="-122"/>
+                <a:cs typeface="Calibri" pitchFamily="34" charset="-120"/>
               </a:rPr>
               <a:t>ACTIVITY 1 · DO THIS NOW</a:t>
             </a:r>
@@ -12847,13 +12847,13 @@
               <a:buNone/>
             </a:pPr>
             <a:r>
-              <a:rPr lang="en-US" sz="2600" b="1" dirty="0">
+              <a:rPr lang="en-US" sz="2600" b="0" dirty="0">
                 <a:solidFill>
                   <a:srgbClr val="2E4436"/>
                 </a:solidFill>
-                <a:latin typeface="Libre Caslon Display" pitchFamily="34" charset="0"/>
-                <a:ea typeface="Libre Caslon Display" pitchFamily="34" charset="-122"/>
-                <a:cs typeface="Libre Caslon Display" pitchFamily="34" charset="-120"/>
+                <a:latin typeface="Georgia" pitchFamily="34" charset="0"/>
+                <a:ea typeface="Georgia" pitchFamily="34" charset="-122"/>
+                <a:cs typeface="Georgia" pitchFamily="34" charset="-120"/>
               </a:rPr>
               <a:t>My Screen Time, Right Now</a:t>
             </a:r>
@@ -12890,9 +12890,9 @@
                 <a:solidFill>
                   <a:srgbClr val="5C6552"/>
                 </a:solidFill>
-                <a:latin typeface="Karla" pitchFamily="34" charset="0"/>
-                <a:ea typeface="Karla" pitchFamily="34" charset="-122"/>
-                <a:cs typeface="Karla" pitchFamily="34" charset="-120"/>
+                <a:latin typeface="Calibri" pitchFamily="34" charset="0"/>
+                <a:ea typeface="Calibri" pitchFamily="34" charset="-122"/>
+                <a:cs typeface="Calibri" pitchFamily="34" charset="-120"/>
               </a:rPr>
               <a:t>Answer honestly and briefly. There are no wrong answers. You’ll come back to this twice more this term.</a:t>
             </a:r>
@@ -12953,9 +12953,9 @@
                 <a:solidFill>
                   <a:srgbClr val="FFFFFF"/>
                 </a:solidFill>
-                <a:latin typeface="Karla" pitchFamily="34" charset="0"/>
-                <a:ea typeface="Karla" pitchFamily="34" charset="-122"/>
-                <a:cs typeface="Karla" pitchFamily="34" charset="-120"/>
+                <a:latin typeface="Calibri" pitchFamily="34" charset="0"/>
+                <a:ea typeface="Calibri" pitchFamily="34" charset="-122"/>
+                <a:cs typeface="Calibri" pitchFamily="34" charset="-120"/>
               </a:rPr>
               <a:t>1</a:t>
             </a:r>
@@ -12992,9 +12992,9 @@
                 <a:solidFill>
                   <a:srgbClr val="2E4436"/>
                 </a:solidFill>
-                <a:latin typeface="Karla" pitchFamily="34" charset="0"/>
-                <a:ea typeface="Karla" pitchFamily="34" charset="-122"/>
-                <a:cs typeface="Karla" pitchFamily="34" charset="-120"/>
+                <a:latin typeface="Calibri" pitchFamily="34" charset="0"/>
+                <a:ea typeface="Calibri" pitchFamily="34" charset="-122"/>
+                <a:cs typeface="Calibri" pitchFamily="34" charset="-120"/>
               </a:rPr>
               <a:t>Roughly how many hours a day do you spend on a screen outside school?</a:t>
             </a:r>
@@ -13082,9 +13082,9 @@
                 <a:solidFill>
                   <a:srgbClr val="FFFFFF"/>
                 </a:solidFill>
-                <a:latin typeface="Karla" pitchFamily="34" charset="0"/>
-                <a:ea typeface="Karla" pitchFamily="34" charset="-122"/>
-                <a:cs typeface="Karla" pitchFamily="34" charset="-120"/>
+                <a:latin typeface="Calibri" pitchFamily="34" charset="0"/>
+                <a:ea typeface="Calibri" pitchFamily="34" charset="-122"/>
+                <a:cs typeface="Calibri" pitchFamily="34" charset="-120"/>
               </a:rPr>
               <a:t>2</a:t>
             </a:r>
@@ -13121,9 +13121,9 @@
                 <a:solidFill>
                   <a:srgbClr val="2E4436"/>
                 </a:solidFill>
-                <a:latin typeface="Karla" pitchFamily="34" charset="0"/>
-                <a:ea typeface="Karla" pitchFamily="34" charset="-122"/>
-                <a:cs typeface="Karla" pitchFamily="34" charset="-120"/>
+                <a:latin typeface="Calibri" pitchFamily="34" charset="0"/>
+                <a:ea typeface="Calibri" pitchFamily="34" charset="-122"/>
+                <a:cs typeface="Calibri" pitchFamily="34" charset="-120"/>
               </a:rPr>
               <a:t>What do you mostly use it for? Name your top three.</a:t>
             </a:r>
@@ -13211,9 +13211,9 @@
                 <a:solidFill>
                   <a:srgbClr val="FFFFFF"/>
                 </a:solidFill>
-                <a:latin typeface="Karla" pitchFamily="34" charset="0"/>
-                <a:ea typeface="Karla" pitchFamily="34" charset="-122"/>
-                <a:cs typeface="Karla" pitchFamily="34" charset="-120"/>
+                <a:latin typeface="Calibri" pitchFamily="34" charset="0"/>
+                <a:ea typeface="Calibri" pitchFamily="34" charset="-122"/>
+                <a:cs typeface="Calibri" pitchFamily="34" charset="-120"/>
               </a:rPr>
               <a:t>3</a:t>
             </a:r>
@@ -13250,9 +13250,9 @@
                 <a:solidFill>
                   <a:srgbClr val="2E4436"/>
                 </a:solidFill>
-                <a:latin typeface="Karla" pitchFamily="34" charset="0"/>
-                <a:ea typeface="Karla" pitchFamily="34" charset="-122"/>
-                <a:cs typeface="Karla" pitchFamily="34" charset="-120"/>
+                <a:latin typeface="Calibri" pitchFamily="34" charset="0"/>
+                <a:ea typeface="Calibri" pitchFamily="34" charset="-122"/>
+                <a:cs typeface="Calibri" pitchFamily="34" charset="-120"/>
               </a:rPr>
               <a:t>What time of day do you use screens the most?</a:t>
             </a:r>
@@ -13340,9 +13340,9 @@
                 <a:solidFill>
                   <a:srgbClr val="FFFFFF"/>
                 </a:solidFill>
-                <a:latin typeface="Karla" pitchFamily="34" charset="0"/>
-                <a:ea typeface="Karla" pitchFamily="34" charset="-122"/>
-                <a:cs typeface="Karla" pitchFamily="34" charset="-120"/>
+                <a:latin typeface="Calibri" pitchFamily="34" charset="0"/>
+                <a:ea typeface="Calibri" pitchFamily="34" charset="-122"/>
+                <a:cs typeface="Calibri" pitchFamily="34" charset="-120"/>
               </a:rPr>
               <a:t>4</a:t>
             </a:r>
@@ -13379,9 +13379,9 @@
                 <a:solidFill>
                   <a:srgbClr val="2E4436"/>
                 </a:solidFill>
-                <a:latin typeface="Karla" pitchFamily="34" charset="0"/>
-                <a:ea typeface="Karla" pitchFamily="34" charset="-122"/>
-                <a:cs typeface="Karla" pitchFamily="34" charset="-120"/>
+                <a:latin typeface="Calibri" pitchFamily="34" charset="0"/>
+                <a:ea typeface="Calibri" pitchFamily="34" charset="-122"/>
+                <a:cs typeface="Calibri" pitchFamily="34" charset="-120"/>
               </a:rPr>
               <a:t>How do you usually feel afterwards: drained, flat, fine, good or energised?</a:t>
             </a:r>
@@ -13469,9 +13469,9 @@
                 <a:solidFill>
                   <a:srgbClr val="FFFFFF"/>
                 </a:solidFill>
-                <a:latin typeface="Karla" pitchFamily="34" charset="0"/>
-                <a:ea typeface="Karla" pitchFamily="34" charset="-122"/>
-                <a:cs typeface="Karla" pitchFamily="34" charset="-120"/>
+                <a:latin typeface="Calibri" pitchFamily="34" charset="0"/>
+                <a:ea typeface="Calibri" pitchFamily="34" charset="-122"/>
+                <a:cs typeface="Calibri" pitchFamily="34" charset="-120"/>
               </a:rPr>
               <a:t>5</a:t>
             </a:r>
@@ -13508,9 +13508,9 @@
                 <a:solidFill>
                   <a:srgbClr val="2E4436"/>
                 </a:solidFill>
-                <a:latin typeface="Karla" pitchFamily="34" charset="0"/>
-                <a:ea typeface="Karla" pitchFamily="34" charset="-122"/>
-                <a:cs typeface="Karla" pitchFamily="34" charset="-120"/>
+                <a:latin typeface="Calibri" pitchFamily="34" charset="0"/>
+                <a:ea typeface="Calibri" pitchFamily="34" charset="-122"/>
+                <a:cs typeface="Calibri" pitchFamily="34" charset="-120"/>
               </a:rPr>
               <a:t>Is there a moment today you’d have spent differently, looking back?</a:t>
             </a:r>
@@ -13547,9 +13547,9 @@
                 <a:solidFill>
                   <a:srgbClr val="C28F38"/>
                 </a:solidFill>
-                <a:latin typeface="Karla" pitchFamily="34" charset="0"/>
-                <a:ea typeface="Karla" pitchFamily="34" charset="-122"/>
-                <a:cs typeface="Karla" pitchFamily="34" charset="-120"/>
+                <a:latin typeface="Calibri" pitchFamily="34" charset="0"/>
+                <a:ea typeface="Calibri" pitchFamily="34" charset="-122"/>
+                <a:cs typeface="Calibri" pitchFamily="34" charset="-120"/>
               </a:rPr>
               <a:t>Printable worksheet version: My Screen Time, Right Now (PDF)</a:t>
             </a:r>
@@ -13586,9 +13586,9 @@
                 <a:solidFill>
                   <a:srgbClr val="C28F38"/>
                 </a:solidFill>
-                <a:latin typeface="Karla" pitchFamily="34" charset="0"/>
-                <a:ea typeface="Karla" pitchFamily="34" charset="-122"/>
-                <a:cs typeface="Karla" pitchFamily="34" charset="-120"/>
+                <a:latin typeface="Calibri" pitchFamily="34" charset="0"/>
+                <a:ea typeface="Calibri" pitchFamily="34" charset="-122"/>
+                <a:cs typeface="Calibri" pitchFamily="34" charset="-120"/>
               </a:rPr>
               <a:t>SESSION 1</a:t>
             </a:r>
